--- a/others/PRESENTACION FINAL.pptx
+++ b/others/PRESENTACION FINAL.pptx
@@ -7,10 +7,10 @@
     <p:sldMasterId id="2147494622" r:id="rId6"/>
   </p:sldMasterIdLst>
   <p:notesMasterIdLst>
-    <p:notesMasterId r:id="rId15"/>
+    <p:notesMasterId r:id="rId18"/>
   </p:notesMasterIdLst>
   <p:handoutMasterIdLst>
-    <p:handoutMasterId r:id="rId16"/>
+    <p:handoutMasterId r:id="rId19"/>
   </p:handoutMasterIdLst>
   <p:sldIdLst>
     <p:sldId id="548" r:id="rId7"/>
@@ -18,9 +18,12 @@
     <p:sldId id="562" r:id="rId9"/>
     <p:sldId id="583" r:id="rId10"/>
     <p:sldId id="584" r:id="rId11"/>
-    <p:sldId id="585" r:id="rId12"/>
-    <p:sldId id="586" r:id="rId13"/>
-    <p:sldId id="581" r:id="rId14"/>
+    <p:sldId id="588" r:id="rId12"/>
+    <p:sldId id="585" r:id="rId13"/>
+    <p:sldId id="586" r:id="rId14"/>
+    <p:sldId id="589" r:id="rId15"/>
+    <p:sldId id="590" r:id="rId16"/>
+    <p:sldId id="581" r:id="rId17"/>
   </p:sldIdLst>
   <p:sldSz cx="12188825" cy="6858000"/>
   <p:notesSz cx="6858000" cy="9144000"/>
@@ -169,6 +172,325 @@
     </p:ext>
   </p:extLst>
 </p:presentation>
+</file>
+
+<file path=ppt/revisionInfo.xml><?xml version="1.0" encoding="utf-8"?>
+<p1510:revInfo xmlns:a="http://schemas.openxmlformats.org/drawingml/2006/main" xmlns:r="http://schemas.openxmlformats.org/officeDocument/2006/relationships" xmlns:p1510="http://schemas.microsoft.com/office/powerpoint/2015/10/main">
+  <p1510:revLst>
+    <p1510:client id="{05059503-7689-00E1-272C-4D159037080F}" v="21" dt="2025-06-26T03:00:19.593"/>
+    <p1510:client id="{71633F36-D9A6-BF7B-86A1-F2F00B158D89}" v="1" dt="2025-06-26T04:19:20.027"/>
+    <p1510:client id="{FA971F59-7C47-1473-CD01-2C27DFC12968}" v="676" dt="2025-06-26T03:33:14.011"/>
+  </p1510:revLst>
+</p1510:revInfo>
+</file>
+
+<file path=ppt/changesInfos/changesInfo1.xml><?xml version="1.0" encoding="utf-8"?>
+<pc:chgInfo xmlns:a="http://schemas.openxmlformats.org/drawingml/2006/main" xmlns:r="http://schemas.openxmlformats.org/officeDocument/2006/relationships" xmlns:ac="http://schemas.microsoft.com/office/drawing/2013/main/command" xmlns:pc="http://schemas.microsoft.com/office/powerpoint/2013/main/command">
+  <pc:docChgLst>
+    <pc:chgData name="Andrés Meneses" userId="40798f1a3e334c63" providerId="Windows Live" clId="Web-{71633F36-D9A6-BF7B-86A1-F2F00B158D89}"/>
+    <pc:docChg chg="modSld">
+      <pc:chgData name="Andrés Meneses" userId="40798f1a3e334c63" providerId="Windows Live" clId="Web-{71633F36-D9A6-BF7B-86A1-F2F00B158D89}" dt="2025-06-26T04:19:20.027" v="0"/>
+      <pc:docMkLst>
+        <pc:docMk/>
+      </pc:docMkLst>
+      <pc:sldChg chg="mod modShow">
+        <pc:chgData name="Andrés Meneses" userId="40798f1a3e334c63" providerId="Windows Live" clId="Web-{71633F36-D9A6-BF7B-86A1-F2F00B158D89}" dt="2025-06-26T04:19:20.027" v="0"/>
+        <pc:sldMkLst>
+          <pc:docMk/>
+          <pc:sldMk cId="4204099718" sldId="585"/>
+        </pc:sldMkLst>
+      </pc:sldChg>
+    </pc:docChg>
+  </pc:docChgLst>
+  <pc:docChgLst>
+    <pc:chgData name="Usuario invitado" providerId="Windows Live" clId="Web-{FA971F59-7C47-1473-CD01-2C27DFC12968}"/>
+    <pc:docChg chg="addSld modSld sldOrd">
+      <pc:chgData name="Usuario invitado" userId="" providerId="Windows Live" clId="Web-{FA971F59-7C47-1473-CD01-2C27DFC12968}" dt="2025-06-26T03:33:14.011" v="348"/>
+      <pc:docMkLst>
+        <pc:docMk/>
+      </pc:docMkLst>
+      <pc:sldChg chg="addSp delSp modSp">
+        <pc:chgData name="Usuario invitado" userId="" providerId="Windows Live" clId="Web-{FA971F59-7C47-1473-CD01-2C27DFC12968}" dt="2025-06-26T03:19:00.199" v="332" actId="20577"/>
+        <pc:sldMkLst>
+          <pc:docMk/>
+          <pc:sldMk cId="425621508" sldId="581"/>
+        </pc:sldMkLst>
+        <pc:spChg chg="del">
+          <ac:chgData name="Usuario invitado" userId="" providerId="Windows Live" clId="Web-{FA971F59-7C47-1473-CD01-2C27DFC12968}" dt="2025-06-26T02:46:42.327" v="178"/>
+          <ac:spMkLst>
+            <pc:docMk/>
+            <pc:sldMk cId="425621508" sldId="581"/>
+            <ac:spMk id="3" creationId="{E8E4EC52-BD7A-1B41-8954-196AB9BD02F8}"/>
+          </ac:spMkLst>
+        </pc:spChg>
+        <pc:spChg chg="mod">
+          <ac:chgData name="Usuario invitado" userId="" providerId="Windows Live" clId="Web-{FA971F59-7C47-1473-CD01-2C27DFC12968}" dt="2025-06-26T02:44:26.038" v="147" actId="20577"/>
+          <ac:spMkLst>
+            <pc:docMk/>
+            <pc:sldMk cId="425621508" sldId="581"/>
+            <ac:spMk id="7" creationId="{91F33DDB-060A-DDB9-B494-7F506604D8C4}"/>
+          </ac:spMkLst>
+        </pc:spChg>
+        <pc:spChg chg="add mod">
+          <ac:chgData name="Usuario invitado" userId="" providerId="Windows Live" clId="Web-{FA971F59-7C47-1473-CD01-2C27DFC12968}" dt="2025-06-26T02:46:07.478" v="176" actId="1076"/>
+          <ac:spMkLst>
+            <pc:docMk/>
+            <pc:sldMk cId="425621508" sldId="581"/>
+            <ac:spMk id="18" creationId="{273B7855-D416-328B-EEB6-2C5FAEFCD22E}"/>
+          </ac:spMkLst>
+        </pc:spChg>
+        <pc:spChg chg="add mod">
+          <ac:chgData name="Usuario invitado" userId="" providerId="Windows Live" clId="Web-{FA971F59-7C47-1473-CD01-2C27DFC12968}" dt="2025-06-26T03:19:00.199" v="332" actId="20577"/>
+          <ac:spMkLst>
+            <pc:docMk/>
+            <pc:sldMk cId="425621508" sldId="581"/>
+            <ac:spMk id="19" creationId="{A644A3BB-1113-3554-CF02-ED8AC76D3C51}"/>
+          </ac:spMkLst>
+        </pc:spChg>
+        <pc:spChg chg="add mod">
+          <ac:chgData name="Usuario invitado" userId="" providerId="Windows Live" clId="Web-{FA971F59-7C47-1473-CD01-2C27DFC12968}" dt="2025-06-26T02:45:41.649" v="166" actId="1076"/>
+          <ac:spMkLst>
+            <pc:docMk/>
+            <pc:sldMk cId="425621508" sldId="581"/>
+            <ac:spMk id="50" creationId="{197C8E89-8828-BA4E-C47A-4B214610BD89}"/>
+          </ac:spMkLst>
+        </pc:spChg>
+        <pc:spChg chg="add mod">
+          <ac:chgData name="Usuario invitado" userId="" providerId="Windows Live" clId="Web-{FA971F59-7C47-1473-CD01-2C27DFC12968}" dt="2025-06-26T02:46:02.791" v="175" actId="1076"/>
+          <ac:spMkLst>
+            <pc:docMk/>
+            <pc:sldMk cId="425621508" sldId="581"/>
+            <ac:spMk id="51" creationId="{33D31C5A-83FB-439E-66CA-8AE8ABDF83CF}"/>
+          </ac:spMkLst>
+        </pc:spChg>
+        <pc:graphicFrameChg chg="modGraphic">
+          <ac:chgData name="Usuario invitado" userId="" providerId="Windows Live" clId="Web-{FA971F59-7C47-1473-CD01-2C27DFC12968}" dt="2025-06-26T02:42:34.082" v="108" actId="20577"/>
+          <ac:graphicFrameMkLst>
+            <pc:docMk/>
+            <pc:sldMk cId="425621508" sldId="581"/>
+            <ac:graphicFrameMk id="8" creationId="{135D3F68-F84D-AD30-116B-D226C7F1AA89}"/>
+          </ac:graphicFrameMkLst>
+        </pc:graphicFrameChg>
+      </pc:sldChg>
+      <pc:sldChg chg="delSp">
+        <pc:chgData name="Usuario invitado" userId="" providerId="Windows Live" clId="Web-{FA971F59-7C47-1473-CD01-2C27DFC12968}" dt="2025-06-26T02:47:13.702" v="185"/>
+        <pc:sldMkLst>
+          <pc:docMk/>
+          <pc:sldMk cId="3222832580" sldId="583"/>
+        </pc:sldMkLst>
+        <pc:spChg chg="del">
+          <ac:chgData name="Usuario invitado" userId="" providerId="Windows Live" clId="Web-{FA971F59-7C47-1473-CD01-2C27DFC12968}" dt="2025-06-26T02:47:13.702" v="185"/>
+          <ac:spMkLst>
+            <pc:docMk/>
+            <pc:sldMk cId="3222832580" sldId="583"/>
+            <ac:spMk id="3" creationId="{A78DFE22-71AE-C31F-6FCA-881EC4BBCA0E}"/>
+          </ac:spMkLst>
+        </pc:spChg>
+      </pc:sldChg>
+      <pc:sldChg chg="delSp">
+        <pc:chgData name="Usuario invitado" userId="" providerId="Windows Live" clId="Web-{FA971F59-7C47-1473-CD01-2C27DFC12968}" dt="2025-06-26T02:47:09.687" v="184"/>
+        <pc:sldMkLst>
+          <pc:docMk/>
+          <pc:sldMk cId="2584259642" sldId="584"/>
+        </pc:sldMkLst>
+        <pc:spChg chg="del">
+          <ac:chgData name="Usuario invitado" userId="" providerId="Windows Live" clId="Web-{FA971F59-7C47-1473-CD01-2C27DFC12968}" dt="2025-06-26T02:47:09.687" v="184"/>
+          <ac:spMkLst>
+            <pc:docMk/>
+            <pc:sldMk cId="2584259642" sldId="584"/>
+            <ac:spMk id="3" creationId="{8BAD72BC-0F62-1E6C-E9DA-0D5B42A9DBF4}"/>
+          </ac:spMkLst>
+        </pc:spChg>
+      </pc:sldChg>
+      <pc:sldChg chg="delSp">
+        <pc:chgData name="Usuario invitado" userId="" providerId="Windows Live" clId="Web-{FA971F59-7C47-1473-CD01-2C27DFC12968}" dt="2025-06-26T02:46:54.061" v="180"/>
+        <pc:sldMkLst>
+          <pc:docMk/>
+          <pc:sldMk cId="4204099718" sldId="585"/>
+        </pc:sldMkLst>
+        <pc:spChg chg="del">
+          <ac:chgData name="Usuario invitado" userId="" providerId="Windows Live" clId="Web-{FA971F59-7C47-1473-CD01-2C27DFC12968}" dt="2025-06-26T02:46:54.061" v="180"/>
+          <ac:spMkLst>
+            <pc:docMk/>
+            <pc:sldMk cId="4204099718" sldId="585"/>
+            <ac:spMk id="3" creationId="{FA6CC8B4-E0C5-82FF-F35D-3CBCA713544D}"/>
+          </ac:spMkLst>
+        </pc:spChg>
+      </pc:sldChg>
+      <pc:sldChg chg="delSp modSp">
+        <pc:chgData name="Usuario invitado" userId="" providerId="Windows Live" clId="Web-{FA971F59-7C47-1473-CD01-2C27DFC12968}" dt="2025-06-26T02:47:03.686" v="183" actId="1076"/>
+        <pc:sldMkLst>
+          <pc:docMk/>
+          <pc:sldMk cId="3420825718" sldId="588"/>
+        </pc:sldMkLst>
+        <pc:spChg chg="del">
+          <ac:chgData name="Usuario invitado" userId="" providerId="Windows Live" clId="Web-{FA971F59-7C47-1473-CD01-2C27DFC12968}" dt="2025-06-26T02:46:59.968" v="182"/>
+          <ac:spMkLst>
+            <pc:docMk/>
+            <pc:sldMk cId="3420825718" sldId="588"/>
+            <ac:spMk id="3" creationId="{6F103108-6A9C-E2AA-B98C-15A6F0585472}"/>
+          </ac:spMkLst>
+        </pc:spChg>
+        <pc:picChg chg="mod">
+          <ac:chgData name="Usuario invitado" userId="" providerId="Windows Live" clId="Web-{FA971F59-7C47-1473-CD01-2C27DFC12968}" dt="2025-06-26T02:47:03.686" v="183" actId="1076"/>
+          <ac:picMkLst>
+            <pc:docMk/>
+            <pc:sldMk cId="3420825718" sldId="588"/>
+            <ac:picMk id="4" creationId="{2811DF57-AC01-C239-9A80-479F7ADA89B1}"/>
+          </ac:picMkLst>
+        </pc:picChg>
+      </pc:sldChg>
+      <pc:sldChg chg="addSp delSp modSp add replId">
+        <pc:chgData name="Usuario invitado" userId="" providerId="Windows Live" clId="Web-{FA971F59-7C47-1473-CD01-2C27DFC12968}" dt="2025-06-26T02:46:46.374" v="179"/>
+        <pc:sldMkLst>
+          <pc:docMk/>
+          <pc:sldMk cId="25790549" sldId="589"/>
+        </pc:sldMkLst>
+        <pc:spChg chg="mod">
+          <ac:chgData name="Usuario invitado" userId="" providerId="Windows Live" clId="Web-{FA971F59-7C47-1473-CD01-2C27DFC12968}" dt="2025-06-26T02:35:22.134" v="78" actId="20577"/>
+          <ac:spMkLst>
+            <pc:docMk/>
+            <pc:sldMk cId="25790549" sldId="589"/>
+            <ac:spMk id="5" creationId="{69D6BE99-BB5D-6A2D-2EEF-83B81B659E98}"/>
+          </ac:spMkLst>
+        </pc:spChg>
+        <pc:spChg chg="del">
+          <ac:chgData name="Usuario invitado" userId="" providerId="Windows Live" clId="Web-{FA971F59-7C47-1473-CD01-2C27DFC12968}" dt="2025-06-26T02:46:46.374" v="179"/>
+          <ac:spMkLst>
+            <pc:docMk/>
+            <pc:sldMk cId="25790549" sldId="589"/>
+            <ac:spMk id="10" creationId="{57772450-EA07-355D-70AC-2567D479481B}"/>
+          </ac:spMkLst>
+        </pc:spChg>
+        <pc:graphicFrameChg chg="add del mod modGraphic">
+          <ac:chgData name="Usuario invitado" userId="" providerId="Windows Live" clId="Web-{FA971F59-7C47-1473-CD01-2C27DFC12968}" dt="2025-06-26T02:34:45.243" v="66"/>
+          <ac:graphicFrameMkLst>
+            <pc:docMk/>
+            <pc:sldMk cId="25790549" sldId="589"/>
+            <ac:graphicFrameMk id="4" creationId="{89C59718-DFDD-81E4-6608-AF7DFD91F82A}"/>
+          </ac:graphicFrameMkLst>
+        </pc:graphicFrameChg>
+        <pc:graphicFrameChg chg="add del mod modGraphic">
+          <ac:chgData name="Usuario invitado" userId="" providerId="Windows Live" clId="Web-{FA971F59-7C47-1473-CD01-2C27DFC12968}" dt="2025-06-26T02:34:44.790" v="65"/>
+          <ac:graphicFrameMkLst>
+            <pc:docMk/>
+            <pc:sldMk cId="25790549" sldId="589"/>
+            <ac:graphicFrameMk id="7" creationId="{9212AE42-6D1A-EB08-D565-DA0B1B537EB2}"/>
+          </ac:graphicFrameMkLst>
+        </pc:graphicFrameChg>
+        <pc:picChg chg="add mod">
+          <ac:chgData name="Usuario invitado" userId="" providerId="Windows Live" clId="Web-{FA971F59-7C47-1473-CD01-2C27DFC12968}" dt="2025-06-26T02:35:11.447" v="69" actId="1076"/>
+          <ac:picMkLst>
+            <pc:docMk/>
+            <pc:sldMk cId="25790549" sldId="589"/>
+            <ac:picMk id="8" creationId="{9DC6966A-1329-22E8-53E1-297879E3182E}"/>
+          </ac:picMkLst>
+        </pc:picChg>
+        <pc:picChg chg="del">
+          <ac:chgData name="Usuario invitado" userId="" providerId="Windows Live" clId="Web-{FA971F59-7C47-1473-CD01-2C27DFC12968}" dt="2025-06-26T02:33:59.601" v="53"/>
+          <ac:picMkLst>
+            <pc:docMk/>
+            <pc:sldMk cId="25790549" sldId="589"/>
+            <ac:picMk id="11" creationId="{15D2A408-358A-1129-0AA1-8672FC76D56F}"/>
+          </ac:picMkLst>
+        </pc:picChg>
+      </pc:sldChg>
+      <pc:sldChg chg="modSp new ord">
+        <pc:chgData name="Usuario invitado" userId="" providerId="Windows Live" clId="Web-{FA971F59-7C47-1473-CD01-2C27DFC12968}" dt="2025-06-26T03:33:14.011" v="348"/>
+        <pc:sldMkLst>
+          <pc:docMk/>
+          <pc:sldMk cId="3566481741" sldId="590"/>
+        </pc:sldMkLst>
+        <pc:spChg chg="mod">
+          <ac:chgData name="Usuario invitado" userId="" providerId="Windows Live" clId="Web-{FA971F59-7C47-1473-CD01-2C27DFC12968}" dt="2025-06-26T03:33:02.949" v="347" actId="1076"/>
+          <ac:spMkLst>
+            <pc:docMk/>
+            <pc:sldMk cId="3566481741" sldId="590"/>
+            <ac:spMk id="4" creationId="{D0F84C1F-172E-B35F-5695-6476FD46AD9C}"/>
+          </ac:spMkLst>
+        </pc:spChg>
+        <pc:spChg chg="mod">
+          <ac:chgData name="Usuario invitado" userId="" providerId="Windows Live" clId="Web-{FA971F59-7C47-1473-CD01-2C27DFC12968}" dt="2025-06-26T03:14:31.155" v="208" actId="20577"/>
+          <ac:spMkLst>
+            <pc:docMk/>
+            <pc:sldMk cId="3566481741" sldId="590"/>
+            <ac:spMk id="5" creationId="{D5A2D749-1616-6F3F-B36A-960236F3677D}"/>
+          </ac:spMkLst>
+        </pc:spChg>
+      </pc:sldChg>
+    </pc:docChg>
+  </pc:docChgLst>
+  <pc:docChgLst>
+    <pc:chgData name="Jhonattan Reales De La Asunción" userId="26ba37350bc8f08f" providerId="Windows Live" clId="Web-{05059503-7689-00E1-272C-4D159037080F}"/>
+    <pc:docChg chg="addSld delSld modSld">
+      <pc:chgData name="Jhonattan Reales De La Asunción" userId="26ba37350bc8f08f" providerId="Windows Live" clId="Web-{05059503-7689-00E1-272C-4D159037080F}" dt="2025-06-26T03:00:17.249" v="19" actId="20577"/>
+      <pc:docMkLst>
+        <pc:docMk/>
+      </pc:docMkLst>
+      <pc:sldChg chg="modSp">
+        <pc:chgData name="Jhonattan Reales De La Asunción" userId="26ba37350bc8f08f" providerId="Windows Live" clId="Web-{05059503-7689-00E1-272C-4D159037080F}" dt="2025-06-26T03:00:17.249" v="19" actId="20577"/>
+        <pc:sldMkLst>
+          <pc:docMk/>
+          <pc:sldMk cId="2570711544" sldId="570"/>
+        </pc:sldMkLst>
+        <pc:spChg chg="mod">
+          <ac:chgData name="Jhonattan Reales De La Asunción" userId="26ba37350bc8f08f" providerId="Windows Live" clId="Web-{05059503-7689-00E1-272C-4D159037080F}" dt="2025-06-26T03:00:17.249" v="19" actId="20577"/>
+          <ac:spMkLst>
+            <pc:docMk/>
+            <pc:sldMk cId="2570711544" sldId="570"/>
+            <ac:spMk id="28" creationId="{CAE1C9A6-AF46-2647-8629-A655147BCE56}"/>
+          </ac:spMkLst>
+        </pc:spChg>
+        <pc:grpChg chg="mod">
+          <ac:chgData name="Jhonattan Reales De La Asunción" userId="26ba37350bc8f08f" providerId="Windows Live" clId="Web-{05059503-7689-00E1-272C-4D159037080F}" dt="2025-06-26T02:59:21.482" v="11" actId="1076"/>
+          <ac:grpSpMkLst>
+            <pc:docMk/>
+            <pc:sldMk cId="2570711544" sldId="570"/>
+            <ac:grpSpMk id="13" creationId="{220ED2CB-F76B-20BD-6172-80BC0C02B9BF}"/>
+          </ac:grpSpMkLst>
+        </pc:grpChg>
+      </pc:sldChg>
+      <pc:sldChg chg="new del">
+        <pc:chgData name="Jhonattan Reales De La Asunción" userId="26ba37350bc8f08f" providerId="Windows Live" clId="Web-{05059503-7689-00E1-272C-4D159037080F}" dt="2025-06-26T02:01:21.913" v="2"/>
+        <pc:sldMkLst>
+          <pc:docMk/>
+          <pc:sldMk cId="588763943" sldId="587"/>
+        </pc:sldMkLst>
+      </pc:sldChg>
+      <pc:sldChg chg="addSp delSp modSp add replId">
+        <pc:chgData name="Jhonattan Reales De La Asunción" userId="26ba37350bc8f08f" providerId="Windows Live" clId="Web-{05059503-7689-00E1-272C-4D159037080F}" dt="2025-06-26T02:01:46.351" v="9" actId="1076"/>
+        <pc:sldMkLst>
+          <pc:docMk/>
+          <pc:sldMk cId="3420825718" sldId="588"/>
+        </pc:sldMkLst>
+        <pc:spChg chg="mod">
+          <ac:chgData name="Jhonattan Reales De La Asunción" userId="26ba37350bc8f08f" providerId="Windows Live" clId="Web-{05059503-7689-00E1-272C-4D159037080F}" dt="2025-06-26T02:01:37.179" v="7" actId="1076"/>
+          <ac:spMkLst>
+            <pc:docMk/>
+            <pc:sldMk cId="3420825718" sldId="588"/>
+            <ac:spMk id="10" creationId="{4C76B9E9-EF15-B3F9-852C-EA0CA886D761}"/>
+          </ac:spMkLst>
+        </pc:spChg>
+        <pc:picChg chg="add mod">
+          <ac:chgData name="Jhonattan Reales De La Asunción" userId="26ba37350bc8f08f" providerId="Windows Live" clId="Web-{05059503-7689-00E1-272C-4D159037080F}" dt="2025-06-26T02:01:46.351" v="9" actId="1076"/>
+          <ac:picMkLst>
+            <pc:docMk/>
+            <pc:sldMk cId="3420825718" sldId="588"/>
+            <ac:picMk id="4" creationId="{2811DF57-AC01-C239-9A80-479F7ADA89B1}"/>
+          </ac:picMkLst>
+        </pc:picChg>
+        <pc:picChg chg="del">
+          <ac:chgData name="Jhonattan Reales De La Asunción" userId="26ba37350bc8f08f" providerId="Windows Live" clId="Web-{05059503-7689-00E1-272C-4D159037080F}" dt="2025-06-26T02:01:25.506" v="3"/>
+          <ac:picMkLst>
+            <pc:docMk/>
+            <pc:sldMk cId="3420825718" sldId="588"/>
+            <ac:picMk id="9" creationId="{D88A809E-4CB6-409C-135D-27BB55D06A45}"/>
+          </ac:picMkLst>
+        </pc:picChg>
+      </pc:sldChg>
+    </pc:docChg>
+  </pc:docChgLst>
+</pc:chgInfo>
 </file>
 
 <file path=ppt/diagrams/colors1.xml><?xml version="1.0" encoding="utf-8"?>
@@ -1733,7 +2055,7 @@
         <a:lstStyle/>
         <a:p>
           <a:r>
-            <a:rPr lang="es-MX" sz="1400" b="1" dirty="0">
+            <a:rPr lang="es-MX" sz="1400" b="1">
               <a:solidFill>
                 <a:schemeClr val="bg1"/>
               </a:solidFill>
@@ -1782,7 +2104,7 @@
         <a:p>
           <a:pPr algn="just"/>
           <a:r>
-            <a:rPr lang="es-MX" sz="1400" dirty="0"/>
+            <a:rPr lang="es-MX" sz="1400"/>
             <a:t>Carga y Limpieza de Datos</a:t>
           </a:r>
         </a:p>
@@ -1822,14 +2144,14 @@
         <a:lstStyle/>
         <a:p>
           <a:r>
-            <a:rPr lang="es-CO" sz="1400" b="1" dirty="0">
+            <a:rPr lang="es-CO" sz="1400" b="1">
               <a:solidFill>
                 <a:schemeClr val="tx1"/>
               </a:solidFill>
             </a:rPr>
             <a:t>2. Clasificar Demanda</a:t>
           </a:r>
-          <a:endParaRPr lang="es-MX" sz="1400" dirty="0">
+          <a:endParaRPr lang="es-MX" sz="1400">
             <a:solidFill>
               <a:schemeClr val="tx1"/>
             </a:solidFill>
@@ -1868,7 +2190,7 @@
         <a:p>
           <a:pPr algn="just"/>
           <a:r>
-            <a:rPr lang="es-CO" sz="1400" dirty="0">
+            <a:rPr lang="es-CO" sz="1400">
               <a:solidFill>
                 <a:schemeClr val="tx1"/>
               </a:solidFill>
@@ -1876,7 +2198,7 @@
             <a:t>Usando </a:t>
           </a:r>
           <a:r>
-            <a:rPr lang="es-CO" sz="1400" dirty="0" err="1">
+            <a:rPr lang="es-CO" sz="1400" err="1">
               <a:solidFill>
                 <a:schemeClr val="tx1"/>
               </a:solidFill>
@@ -1884,7 +2206,7 @@
             <a:t>CoV</a:t>
           </a:r>
           <a:r>
-            <a:rPr lang="es-CO" sz="1400" dirty="0">
+            <a:rPr lang="es-CO" sz="1400">
               <a:solidFill>
                 <a:schemeClr val="tx1"/>
               </a:solidFill>
@@ -1892,7 +2214,7 @@
             <a:t> e Intermitencia, se clasifica el tipo de demanda como: Errática, Irregular, </a:t>
           </a:r>
           <a:r>
-            <a:rPr lang="es-CO" sz="1400" dirty="0" err="1">
+            <a:rPr lang="es-CO" sz="1400" err="1">
               <a:solidFill>
                 <a:schemeClr val="tx1"/>
               </a:solidFill>
@@ -1900,7 +2222,7 @@
             <a:t>Uneven</a:t>
           </a:r>
           <a:r>
-            <a:rPr lang="es-CO" sz="1400" dirty="0">
+            <a:rPr lang="es-CO" sz="1400">
               <a:solidFill>
                 <a:schemeClr val="tx1"/>
               </a:solidFill>
@@ -1908,7 +2230,7 @@
             <a:t>, </a:t>
           </a:r>
           <a:r>
-            <a:rPr lang="es-CO" sz="1400" dirty="0" err="1">
+            <a:rPr lang="es-CO" sz="1400" err="1">
               <a:solidFill>
                 <a:schemeClr val="tx1"/>
               </a:solidFill>
@@ -1916,14 +2238,14 @@
             <a:t>Smooth</a:t>
           </a:r>
           <a:r>
-            <a:rPr lang="es-CO" sz="1400" dirty="0">
+            <a:rPr lang="es-CO" sz="1400">
               <a:solidFill>
                 <a:schemeClr val="tx1"/>
               </a:solidFill>
             </a:rPr>
             <a:t>, entre otros, para 26 SKU</a:t>
           </a:r>
-          <a:endParaRPr lang="es-MX" sz="1400" dirty="0"/>
+          <a:endParaRPr lang="es-MX" sz="1400"/>
         </a:p>
       </dgm:t>
     </dgm:pt>
@@ -1961,14 +2283,14 @@
         <a:lstStyle/>
         <a:p>
           <a:r>
-            <a:rPr lang="es-CO" sz="1400" b="1" dirty="0">
+            <a:rPr lang="es-CO" sz="1400" b="1">
               <a:solidFill>
                 <a:schemeClr val="bg1"/>
               </a:solidFill>
             </a:rPr>
             <a:t>3. Asignación de Modelos por tipo de demanda</a:t>
           </a:r>
-          <a:endParaRPr lang="es-MX" sz="1400" dirty="0"/>
+          <a:endParaRPr lang="es-MX" sz="1400"/>
         </a:p>
       </dgm:t>
     </dgm:pt>
@@ -2003,7 +2325,7 @@
         <a:p>
           <a:pPr algn="just"/>
           <a:r>
-            <a:rPr lang="es-MX" sz="1400" dirty="0"/>
+            <a:rPr lang="es-MX" sz="1400"/>
             <a:t>Para optimizar el proceso, se asigna a cada SKU un subconjunto de modelos aplicables</a:t>
           </a:r>
         </a:p>
@@ -2043,7 +2365,7 @@
         <a:lstStyle/>
         <a:p>
           <a:r>
-            <a:rPr lang="es-CO" sz="1400" b="1" dirty="0">
+            <a:rPr lang="es-CO" sz="1400" b="1">
               <a:solidFill>
                 <a:schemeClr val="bg1"/>
               </a:solidFill>
@@ -2051,14 +2373,14 @@
             <a:t>4. Corrección </a:t>
           </a:r>
           <a:r>
-            <a:rPr lang="es-CO" sz="1400" b="1" dirty="0" err="1">
+            <a:rPr lang="es-CO" sz="1400" b="1" err="1">
               <a:solidFill>
                 <a:schemeClr val="bg1"/>
               </a:solidFill>
             </a:rPr>
             <a:t>Outliers</a:t>
           </a:r>
-          <a:endParaRPr lang="es-MX" sz="1400" dirty="0"/>
+          <a:endParaRPr lang="es-MX" sz="1400"/>
         </a:p>
       </dgm:t>
     </dgm:pt>
@@ -2096,14 +2418,14 @@
         <a:lstStyle/>
         <a:p>
           <a:r>
-            <a:rPr lang="es-CO" sz="1400" b="1" dirty="0">
+            <a:rPr lang="es-CO" sz="1400" b="1">
               <a:solidFill>
                 <a:schemeClr val="bg1"/>
               </a:solidFill>
             </a:rPr>
             <a:t>5. Evaluación de Modelos Predictivos</a:t>
           </a:r>
-          <a:endParaRPr lang="es-MX" sz="1400" dirty="0"/>
+          <a:endParaRPr lang="es-MX" sz="1400"/>
         </a:p>
       </dgm:t>
     </dgm:pt>
@@ -2138,15 +2460,15 @@
         <a:p>
           <a:pPr algn="just"/>
           <a:r>
-            <a:rPr lang="es-MX" sz="1400" dirty="0"/>
+            <a:rPr lang="es-MX" sz="1400"/>
             <a:t>Corrección de </a:t>
           </a:r>
           <a:r>
-            <a:rPr lang="es-MX" sz="1400" dirty="0" err="1"/>
+            <a:rPr lang="es-MX" sz="1400" err="1"/>
             <a:t>outliers</a:t>
           </a:r>
           <a:r>
-            <a:rPr lang="es-MX" sz="1400" dirty="0"/>
+            <a:rPr lang="es-MX" sz="1400"/>
             <a:t> para cada SKU (valores fuera de 2 desviaciones estándar se reemplazan por los límites).</a:t>
           </a:r>
         </a:p>
@@ -2183,7 +2505,7 @@
         <a:p>
           <a:pPr algn="just"/>
           <a:r>
-            <a:rPr lang="es-MX" sz="1400" dirty="0"/>
+            <a:rPr lang="es-MX" sz="1400"/>
             <a:t>Se identifican mejores modelos de predicción diaria y luego semanal por SKU.</a:t>
           </a:r>
         </a:p>
@@ -2219,7 +2541,7 @@
         <a:lstStyle/>
         <a:p>
           <a:r>
-            <a:rPr lang="es-CO" sz="1400" b="1" dirty="0"/>
+            <a:rPr lang="es-CO" sz="1400" b="1"/>
             <a:t>6. Resumen y Visualización de Resultados</a:t>
           </a:r>
         </a:p>
@@ -2264,7 +2586,7 @@
         <a:p>
           <a:pPr algn="just"/>
           <a:r>
-            <a:rPr lang="es-MX" sz="1400" dirty="0"/>
+            <a:rPr lang="es-MX" sz="1400"/>
             <a:t>Visualización de series de tiempo</a:t>
           </a:r>
         </a:p>
@@ -2300,7 +2622,7 @@
         <a:lstStyle/>
         <a:p>
           <a:r>
-            <a:rPr lang="es-CO" sz="1400" dirty="0"/>
+            <a:rPr lang="es-CO" sz="1400"/>
             <a:t>Resumen final con gráfico por serie de tiempo, mejor modelo y métrica de error.</a:t>
           </a:r>
         </a:p>
@@ -2703,13 +3025,17 @@
       </dgm:t>
     </dgm:pt>
     <dgm:pt modelId="{A7C2C5A2-33F8-422F-8D70-251B4A1493EC}">
-      <dgm:prSet/>
+      <dgm:prSet phldr="0"/>
       <dgm:spPr/>
       <dgm:t>
         <a:bodyPr/>
         <a:lstStyle/>
         <a:p>
-          <a:endParaRPr lang="en-US" dirty="0"/>
+          <a:pPr rtl="0"/>
+          <a:endParaRPr lang="es-CO">
+            <a:latin typeface="Times New Roman"/>
+            <a:cs typeface="Times New Roman"/>
+          </a:endParaRPr>
         </a:p>
       </dgm:t>
     </dgm:pt>
@@ -2742,7 +3068,7 @@
         <a:bodyPr/>
         <a:lstStyle/>
         <a:p>
-          <a:endParaRPr lang="en-US" dirty="0">
+          <a:endParaRPr lang="en-US">
             <a:solidFill>
               <a:schemeClr val="tx1"/>
             </a:solidFill>
@@ -2779,7 +3105,7 @@
         <a:bodyPr/>
         <a:lstStyle/>
         <a:p>
-          <a:endParaRPr lang="en-US" b="0" dirty="0">
+          <a:endParaRPr lang="en-US" b="0">
             <a:solidFill>
               <a:schemeClr val="tx1"/>
             </a:solidFill>
@@ -2816,7 +3142,7 @@
         <a:bodyPr/>
         <a:lstStyle/>
         <a:p>
-          <a:endParaRPr lang="en-US" dirty="0">
+          <a:endParaRPr lang="en-US">
             <a:solidFill>
               <a:schemeClr val="tx1"/>
             </a:solidFill>
@@ -3004,7 +3330,7 @@
             <a:buChar char="•"/>
           </a:pPr>
           <a:r>
-            <a:rPr lang="es-MX" sz="1400" kern="1200" dirty="0"/>
+            <a:rPr lang="es-MX" sz="1400" kern="1200"/>
             <a:t>Carga y Limpieza de Datos</a:t>
           </a:r>
         </a:p>
@@ -3022,7 +3348,7 @@
             <a:buChar char="•"/>
           </a:pPr>
           <a:r>
-            <a:rPr lang="es-MX" sz="1400" kern="1200" dirty="0"/>
+            <a:rPr lang="es-MX" sz="1400" kern="1200"/>
             <a:t>Visualización de series de tiempo</a:t>
           </a:r>
         </a:p>
@@ -3142,7 +3468,7 @@
             <a:buNone/>
           </a:pPr>
           <a:r>
-            <a:rPr lang="es-MX" sz="1400" b="1" kern="1200" dirty="0">
+            <a:rPr lang="es-MX" sz="1400" b="1" kern="1200">
               <a:solidFill>
                 <a:schemeClr val="bg1"/>
               </a:solidFill>
@@ -3225,7 +3551,7 @@
             <a:buChar char="•"/>
           </a:pPr>
           <a:r>
-            <a:rPr lang="es-CO" sz="1400" kern="1200" dirty="0">
+            <a:rPr lang="es-CO" sz="1400" kern="1200">
               <a:solidFill>
                 <a:schemeClr val="tx1"/>
               </a:solidFill>
@@ -3233,7 +3559,7 @@
             <a:t>Usando </a:t>
           </a:r>
           <a:r>
-            <a:rPr lang="es-CO" sz="1400" kern="1200" dirty="0" err="1">
+            <a:rPr lang="es-CO" sz="1400" kern="1200" err="1">
               <a:solidFill>
                 <a:schemeClr val="tx1"/>
               </a:solidFill>
@@ -3241,7 +3567,7 @@
             <a:t>CoV</a:t>
           </a:r>
           <a:r>
-            <a:rPr lang="es-CO" sz="1400" kern="1200" dirty="0">
+            <a:rPr lang="es-CO" sz="1400" kern="1200">
               <a:solidFill>
                 <a:schemeClr val="tx1"/>
               </a:solidFill>
@@ -3249,7 +3575,7 @@
             <a:t> e Intermitencia, se clasifica el tipo de demanda como: Errática, Irregular, </a:t>
           </a:r>
           <a:r>
-            <a:rPr lang="es-CO" sz="1400" kern="1200" dirty="0" err="1">
+            <a:rPr lang="es-CO" sz="1400" kern="1200" err="1">
               <a:solidFill>
                 <a:schemeClr val="tx1"/>
               </a:solidFill>
@@ -3257,7 +3583,7 @@
             <a:t>Uneven</a:t>
           </a:r>
           <a:r>
-            <a:rPr lang="es-CO" sz="1400" kern="1200" dirty="0">
+            <a:rPr lang="es-CO" sz="1400" kern="1200">
               <a:solidFill>
                 <a:schemeClr val="tx1"/>
               </a:solidFill>
@@ -3265,7 +3591,7 @@
             <a:t>, </a:t>
           </a:r>
           <a:r>
-            <a:rPr lang="es-CO" sz="1400" kern="1200" dirty="0" err="1">
+            <a:rPr lang="es-CO" sz="1400" kern="1200" err="1">
               <a:solidFill>
                 <a:schemeClr val="tx1"/>
               </a:solidFill>
@@ -3273,14 +3599,14 @@
             <a:t>Smooth</a:t>
           </a:r>
           <a:r>
-            <a:rPr lang="es-CO" sz="1400" kern="1200" dirty="0">
+            <a:rPr lang="es-CO" sz="1400" kern="1200">
               <a:solidFill>
                 <a:schemeClr val="tx1"/>
               </a:solidFill>
             </a:rPr>
             <a:t>, entre otros, para 26 SKU</a:t>
           </a:r>
-          <a:endParaRPr lang="es-MX" sz="1400" kern="1200" dirty="0"/>
+          <a:endParaRPr lang="es-MX" sz="1400" kern="1200"/>
         </a:p>
       </dsp:txBody>
       <dsp:txXfrm>
@@ -3401,14 +3727,14 @@
             <a:buNone/>
           </a:pPr>
           <a:r>
-            <a:rPr lang="es-CO" sz="1400" b="1" kern="1200" dirty="0">
+            <a:rPr lang="es-CO" sz="1400" b="1" kern="1200">
               <a:solidFill>
                 <a:schemeClr val="tx1"/>
               </a:solidFill>
             </a:rPr>
             <a:t>2. Clasificar Demanda</a:t>
           </a:r>
-          <a:endParaRPr lang="es-MX" sz="1400" kern="1200" dirty="0">
+          <a:endParaRPr lang="es-MX" sz="1400" kern="1200">
             <a:solidFill>
               <a:schemeClr val="tx1"/>
             </a:solidFill>
@@ -3489,7 +3815,7 @@
             <a:buChar char="•"/>
           </a:pPr>
           <a:r>
-            <a:rPr lang="es-MX" sz="1400" kern="1200" dirty="0"/>
+            <a:rPr lang="es-MX" sz="1400" kern="1200"/>
             <a:t>Para optimizar el proceso, se asigna a cada SKU un subconjunto de modelos aplicables</a:t>
           </a:r>
         </a:p>
@@ -3612,14 +3938,14 @@
             <a:buNone/>
           </a:pPr>
           <a:r>
-            <a:rPr lang="es-CO" sz="1400" b="1" kern="1200" dirty="0">
+            <a:rPr lang="es-CO" sz="1400" b="1" kern="1200">
               <a:solidFill>
                 <a:schemeClr val="bg1"/>
               </a:solidFill>
             </a:rPr>
             <a:t>3. Asignación de Modelos por tipo de demanda</a:t>
           </a:r>
-          <a:endParaRPr lang="es-MX" sz="1400" kern="1200" dirty="0"/>
+          <a:endParaRPr lang="es-MX" sz="1400" kern="1200"/>
         </a:p>
       </dsp:txBody>
       <dsp:txXfrm>
@@ -3696,15 +4022,15 @@
             <a:buChar char="•"/>
           </a:pPr>
           <a:r>
-            <a:rPr lang="es-MX" sz="1400" kern="1200" dirty="0"/>
+            <a:rPr lang="es-MX" sz="1400" kern="1200"/>
             <a:t>Corrección de </a:t>
           </a:r>
           <a:r>
-            <a:rPr lang="es-MX" sz="1400" kern="1200" dirty="0" err="1"/>
+            <a:rPr lang="es-MX" sz="1400" kern="1200" err="1"/>
             <a:t>outliers</a:t>
           </a:r>
           <a:r>
-            <a:rPr lang="es-MX" sz="1400" kern="1200" dirty="0"/>
+            <a:rPr lang="es-MX" sz="1400" kern="1200"/>
             <a:t> para cada SKU (valores fuera de 2 desviaciones estándar se reemplazan por los límites).</a:t>
           </a:r>
         </a:p>
@@ -3827,7 +4153,7 @@
             <a:buNone/>
           </a:pPr>
           <a:r>
-            <a:rPr lang="es-CO" sz="1400" b="1" kern="1200" dirty="0">
+            <a:rPr lang="es-CO" sz="1400" b="1" kern="1200">
               <a:solidFill>
                 <a:schemeClr val="bg1"/>
               </a:solidFill>
@@ -3835,14 +4161,14 @@
             <a:t>4. Corrección </a:t>
           </a:r>
           <a:r>
-            <a:rPr lang="es-CO" sz="1400" b="1" kern="1200" dirty="0" err="1">
+            <a:rPr lang="es-CO" sz="1400" b="1" kern="1200" err="1">
               <a:solidFill>
                 <a:schemeClr val="bg1"/>
               </a:solidFill>
             </a:rPr>
             <a:t>Outliers</a:t>
           </a:r>
-          <a:endParaRPr lang="es-MX" sz="1400" kern="1200" dirty="0"/>
+          <a:endParaRPr lang="es-MX" sz="1400" kern="1200"/>
         </a:p>
       </dsp:txBody>
       <dsp:txXfrm>
@@ -3919,7 +4245,7 @@
             <a:buChar char="•"/>
           </a:pPr>
           <a:r>
-            <a:rPr lang="es-MX" sz="1400" kern="1200" dirty="0"/>
+            <a:rPr lang="es-MX" sz="1400" kern="1200"/>
             <a:t>Se identifican mejores modelos de predicción diaria y luego semanal por SKU.</a:t>
           </a:r>
         </a:p>
@@ -4042,14 +4368,14 @@
             <a:buNone/>
           </a:pPr>
           <a:r>
-            <a:rPr lang="es-CO" sz="1400" b="1" kern="1200" dirty="0">
+            <a:rPr lang="es-CO" sz="1400" b="1" kern="1200">
               <a:solidFill>
                 <a:schemeClr val="bg1"/>
               </a:solidFill>
             </a:rPr>
             <a:t>5. Evaluación de Modelos Predictivos</a:t>
           </a:r>
-          <a:endParaRPr lang="es-MX" sz="1400" kern="1200" dirty="0"/>
+          <a:endParaRPr lang="es-MX" sz="1400" kern="1200"/>
         </a:p>
       </dsp:txBody>
       <dsp:txXfrm>
@@ -4126,7 +4452,7 @@
             <a:buChar char="•"/>
           </a:pPr>
           <a:r>
-            <a:rPr lang="es-CO" sz="1400" kern="1200" dirty="0"/>
+            <a:rPr lang="es-CO" sz="1400" kern="1200"/>
             <a:t>Resumen final con gráfico por serie de tiempo, mejor modelo y métrica de error.</a:t>
           </a:r>
         </a:p>
@@ -4206,7 +4532,7 @@
             <a:buNone/>
           </a:pPr>
           <a:r>
-            <a:rPr lang="es-CO" sz="1400" b="1" kern="1200" dirty="0"/>
+            <a:rPr lang="es-CO" sz="1400" b="1" kern="1200"/>
             <a:t>6. Resumen y Visualización de Resultados</a:t>
           </a:r>
         </a:p>
@@ -4327,7 +4653,7 @@
         </a:bodyPr>
         <a:lstStyle/>
         <a:p>
-          <a:pPr marL="0" lvl="0" indent="0" algn="ctr" defTabSz="2889250">
+          <a:pPr marL="0" lvl="0" indent="0" algn="ctr" defTabSz="2889250" rtl="0">
             <a:lnSpc>
               <a:spcPct val="90000"/>
             </a:lnSpc>
@@ -4339,7 +4665,10 @@
             </a:spcAft>
             <a:buNone/>
           </a:pPr>
-          <a:endParaRPr lang="en-US" sz="6500" kern="1200" dirty="0"/>
+          <a:endParaRPr lang="es-CO" sz="6500" kern="1200">
+            <a:latin typeface="Times New Roman"/>
+            <a:cs typeface="Times New Roman"/>
+          </a:endParaRPr>
         </a:p>
       </dsp:txBody>
       <dsp:txXfrm>
@@ -4414,7 +4743,7 @@
             </a:spcAft>
             <a:buNone/>
           </a:pPr>
-          <a:endParaRPr lang="en-US" sz="6500" kern="1200" dirty="0">
+          <a:endParaRPr lang="en-US" sz="6500" kern="1200">
             <a:solidFill>
               <a:schemeClr val="tx1"/>
             </a:solidFill>
@@ -4493,7 +4822,7 @@
             </a:spcAft>
             <a:buNone/>
           </a:pPr>
-          <a:endParaRPr lang="en-US" sz="6500" b="0" kern="1200" dirty="0">
+          <a:endParaRPr lang="en-US" sz="6500" b="0" kern="1200">
             <a:solidFill>
               <a:schemeClr val="tx1"/>
             </a:solidFill>
@@ -4572,7 +4901,7 @@
             </a:spcAft>
             <a:buNone/>
           </a:pPr>
-          <a:endParaRPr lang="en-US" sz="6500" kern="1200" dirty="0">
+          <a:endParaRPr lang="en-US" sz="6500" kern="1200">
             <a:solidFill>
               <a:schemeClr val="tx1"/>
             </a:solidFill>
@@ -7526,7 +7855,7 @@
               <a:pPr>
                 <a:defRPr/>
               </a:pPr>
-              <a:t>06/24/2025</a:t>
+              <a:t>6/25/2025</a:t>
             </a:fld>
             <a:endParaRPr lang="en-US"/>
           </a:p>
@@ -7617,7 +7946,7 @@
               <a:pPr>
                 <a:defRPr/>
               </a:pPr>
-              <a:t>‹Nº›</a:t>
+              <a:t>‹#›</a:t>
             </a:fld>
             <a:endParaRPr lang="en-US"/>
           </a:p>
@@ -7745,7 +8074,7 @@
               <a:pPr>
                 <a:defRPr/>
               </a:pPr>
-              <a:t>06/24/2025</a:t>
+              <a:t>6/25/2025</a:t>
             </a:fld>
             <a:endParaRPr lang="en-US"/>
           </a:p>
@@ -7929,7 +8258,7 @@
               <a:pPr>
                 <a:defRPr/>
               </a:pPr>
-              <a:t>‹Nº›</a:t>
+              <a:t>‹#›</a:t>
             </a:fld>
             <a:endParaRPr lang="en-US"/>
           </a:p>
@@ -8117,101 +8446,101 @@
               <a:buNone/>
             </a:pPr>
             <a:r>
-              <a:rPr lang="es-MX" b="1" dirty="0"/>
+              <a:rPr lang="es-MX" b="1"/>
               <a:t>Fase: Prepare </a:t>
             </a:r>
             <a:r>
-              <a:rPr lang="es-MX" b="1" dirty="0" err="1"/>
+              <a:rPr lang="es-MX" b="1" err="1"/>
               <a:t>for</a:t>
             </a:r>
             <a:r>
-              <a:rPr lang="es-MX" b="1" dirty="0"/>
+              <a:rPr lang="es-MX" b="1"/>
               <a:t> </a:t>
             </a:r>
             <a:r>
-              <a:rPr lang="es-MX" b="1" dirty="0" err="1"/>
+              <a:rPr lang="es-MX" b="1" err="1"/>
               <a:t>Implementation</a:t>
             </a:r>
-            <a:endParaRPr lang="es-MX" b="1" dirty="0"/>
+            <a:endParaRPr lang="es-MX" b="1"/>
           </a:p>
           <a:p>
             <a:pPr>
               <a:buNone/>
             </a:pPr>
-            <a:endParaRPr lang="es-MX" b="1" dirty="0"/>
+            <a:endParaRPr lang="es-MX" b="1"/>
           </a:p>
           <a:p>
             <a:pPr>
               <a:buNone/>
             </a:pPr>
             <a:r>
-              <a:rPr lang="es-MX" b="1" dirty="0"/>
+              <a:rPr lang="es-MX" b="1"/>
               <a:t>Ubicación en ASUM-DM:</a:t>
             </a:r>
             <a:r>
-              <a:rPr lang="es-MX" dirty="0"/>
+              <a:rPr lang="es-MX"/>
               <a:t> </a:t>
             </a:r>
             <a:r>
-              <a:rPr lang="es-MX" dirty="0" err="1"/>
+              <a:rPr lang="es-MX" err="1"/>
               <a:t>Analyze</a:t>
             </a:r>
             <a:r>
-              <a:rPr lang="es-MX" dirty="0"/>
+              <a:rPr lang="es-MX"/>
               <a:t>-</a:t>
             </a:r>
             <a:r>
-              <a:rPr lang="es-MX" dirty="0" err="1"/>
+              <a:rPr lang="es-MX" err="1"/>
               <a:t>Design</a:t>
             </a:r>
             <a:r>
-              <a:rPr lang="es-MX" dirty="0"/>
+              <a:rPr lang="es-MX"/>
               <a:t>-Configure &amp; </a:t>
             </a:r>
             <a:r>
-              <a:rPr lang="es-MX" dirty="0" err="1"/>
+              <a:rPr lang="es-MX" err="1"/>
               <a:t>Build</a:t>
             </a:r>
             <a:r>
-              <a:rPr lang="es-MX" dirty="0"/>
+              <a:rPr lang="es-MX"/>
               <a:t> → Prepare </a:t>
             </a:r>
             <a:r>
-              <a:rPr lang="es-MX" dirty="0" err="1"/>
+              <a:rPr lang="es-MX" err="1"/>
               <a:t>for</a:t>
             </a:r>
             <a:r>
-              <a:rPr lang="es-MX" dirty="0"/>
+              <a:rPr lang="es-MX"/>
               <a:t> </a:t>
             </a:r>
             <a:r>
-              <a:rPr lang="es-MX" dirty="0" err="1"/>
+              <a:rPr lang="es-MX" err="1"/>
               <a:t>Implementation</a:t>
             </a:r>
-            <a:endParaRPr lang="es-MX" dirty="0"/>
+            <a:endParaRPr lang="es-MX"/>
           </a:p>
           <a:p>
             <a:pPr>
               <a:buNone/>
             </a:pPr>
             <a:r>
-              <a:rPr lang="es-MX" dirty="0"/>
+              <a:rPr lang="es-MX"/>
               <a:t>Esta actividad marca el </a:t>
             </a:r>
             <a:r>
-              <a:rPr lang="es-MX" b="1" dirty="0"/>
+              <a:rPr lang="es-MX" b="1"/>
               <a:t>inicio formal de la ejecución del proyecto analítico</a:t>
             </a:r>
             <a:r>
-              <a:rPr lang="es-MX" dirty="0"/>
+              <a:rPr lang="es-MX"/>
               <a:t>, asegurando que todos los componentes —humanos, técnicos y organizativos— estén alineados y listos para avanzar. Su foco está en la </a:t>
             </a:r>
             <a:r>
-              <a:rPr lang="es-MX" b="1" dirty="0"/>
+              <a:rPr lang="es-MX" b="1"/>
               <a:t>planificación detallada</a:t>
             </a:r>
             <a:r>
-              <a:rPr lang="es-MX" dirty="0"/>
+              <a:rPr lang="es-MX"/>
               <a:t>, la definición de expectativas, y la configuración del equipo y recursos necesarios para la implementación.</a:t>
             </a:r>
           </a:p>
@@ -8219,14 +8548,14 @@
             <a:pPr>
               <a:buNone/>
             </a:pPr>
-            <a:endParaRPr lang="es-MX" dirty="0"/>
+            <a:endParaRPr lang="es-MX"/>
           </a:p>
           <a:p>
             <a:pPr>
               <a:buNone/>
             </a:pPr>
             <a:r>
-              <a:rPr lang="es-MX" b="1" dirty="0"/>
+              <a:rPr lang="es-MX" b="1"/>
               <a:t>Tareas Clave</a:t>
             </a:r>
           </a:p>
@@ -8234,47 +8563,47 @@
             <a:pPr>
               <a:buNone/>
             </a:pPr>
-            <a:endParaRPr lang="es-MX" b="1" dirty="0"/>
+            <a:endParaRPr lang="es-MX" b="1"/>
           </a:p>
           <a:p>
             <a:pPr>
               <a:buNone/>
             </a:pPr>
             <a:r>
-              <a:rPr lang="es-MX" b="1" dirty="0" err="1"/>
+              <a:rPr lang="es-MX" b="1" err="1"/>
               <a:t>Liaise</a:t>
             </a:r>
             <a:r>
-              <a:rPr lang="es-MX" b="1" dirty="0"/>
+              <a:rPr lang="es-MX" b="1"/>
               <a:t> </a:t>
             </a:r>
             <a:r>
-              <a:rPr lang="es-MX" b="1" dirty="0" err="1"/>
+              <a:rPr lang="es-MX" b="1" err="1"/>
               <a:t>with</a:t>
             </a:r>
             <a:r>
-              <a:rPr lang="es-MX" b="1" dirty="0"/>
+              <a:rPr lang="es-MX" b="1"/>
               <a:t> Sales and </a:t>
             </a:r>
             <a:r>
-              <a:rPr lang="es-MX" b="1" dirty="0" err="1"/>
+              <a:rPr lang="es-MX" b="1" err="1"/>
               <a:t>Review</a:t>
             </a:r>
             <a:r>
-              <a:rPr lang="es-MX" b="1" dirty="0"/>
+              <a:rPr lang="es-MX" b="1"/>
               <a:t> Project </a:t>
             </a:r>
             <a:r>
-              <a:rPr lang="es-MX" b="1" dirty="0" err="1"/>
+              <a:rPr lang="es-MX" b="1" err="1"/>
               <a:t>Details</a:t>
             </a:r>
-            <a:endParaRPr lang="es-MX" b="1" dirty="0"/>
+            <a:endParaRPr lang="es-MX" b="1"/>
           </a:p>
           <a:p>
             <a:pPr>
               <a:buNone/>
             </a:pPr>
-            <a:endParaRPr lang="es-MX" b="1" dirty="0"/>
+            <a:endParaRPr lang="es-MX" b="1"/>
           </a:p>
           <a:p>
             <a:pPr>
@@ -8282,11 +8611,11 @@
               <a:buChar char="•"/>
             </a:pPr>
             <a:r>
-              <a:rPr lang="es-MX" b="1" dirty="0"/>
+              <a:rPr lang="es-MX" b="1"/>
               <a:t>Objetivo:</a:t>
             </a:r>
             <a:r>
-              <a:rPr lang="es-MX" dirty="0"/>
+              <a:rPr lang="es-MX"/>
               <a:t> Realizar una reunión con el equipo de ventas para alinear expectativas del cliente, supuestos clave, personalidades involucradas y puntos de apalancamiento.</a:t>
             </a:r>
           </a:p>
@@ -8296,11 +8625,11 @@
               <a:buChar char="•"/>
             </a:pPr>
             <a:r>
-              <a:rPr lang="es-MX" b="1" dirty="0"/>
+              <a:rPr lang="es-MX" b="1"/>
               <a:t>Valor:</a:t>
             </a:r>
             <a:r>
-              <a:rPr lang="es-MX" dirty="0"/>
+              <a:rPr lang="es-MX"/>
               <a:t> Facilita la comprensión profunda del cliente y previene malentendidos en etapas posteriores.</a:t>
             </a:r>
           </a:p>
@@ -8310,10 +8639,10 @@
               <a:buChar char="•"/>
             </a:pPr>
             <a:r>
-              <a:rPr lang="es-MX" b="1" dirty="0"/>
+              <a:rPr lang="es-MX" b="1"/>
               <a:t>Roles clave:</a:t>
             </a:r>
-            <a:endParaRPr lang="es-MX" dirty="0"/>
+            <a:endParaRPr lang="es-MX"/>
           </a:p>
           <a:p>
             <a:pPr marL="742950" lvl="1" indent="-285750">
@@ -8321,14 +8650,14 @@
               <a:buChar char="•"/>
             </a:pPr>
             <a:r>
-              <a:rPr lang="es-MX" dirty="0"/>
+              <a:rPr lang="es-MX"/>
               <a:t>Data </a:t>
             </a:r>
             <a:r>
-              <a:rPr lang="es-MX" dirty="0" err="1"/>
+              <a:rPr lang="es-MX" err="1"/>
               <a:t>Scientist</a:t>
             </a:r>
-            <a:endParaRPr lang="es-MX" dirty="0"/>
+            <a:endParaRPr lang="es-MX"/>
           </a:p>
           <a:p>
             <a:pPr marL="742950" lvl="1" indent="-285750">
@@ -8336,14 +8665,14 @@
               <a:buChar char="•"/>
             </a:pPr>
             <a:r>
-              <a:rPr lang="es-MX" dirty="0"/>
+              <a:rPr lang="es-MX"/>
               <a:t>Enterprise </a:t>
             </a:r>
             <a:r>
-              <a:rPr lang="es-MX" dirty="0" err="1"/>
+              <a:rPr lang="es-MX" err="1"/>
               <a:t>Architect</a:t>
             </a:r>
-            <a:endParaRPr lang="es-MX" dirty="0"/>
+            <a:endParaRPr lang="es-MX"/>
           </a:p>
           <a:p>
             <a:pPr marL="742950" lvl="1" indent="-285750">
@@ -8351,7 +8680,7 @@
               <a:buChar char="•"/>
             </a:pPr>
             <a:r>
-              <a:rPr lang="es-MX" dirty="0"/>
+              <a:rPr lang="es-MX"/>
               <a:t>SPSS Project Manager</a:t>
             </a:r>
           </a:p>
@@ -8360,31 +8689,31 @@
               <a:buFont typeface="Arial" panose="020B0604020202020204" pitchFamily="34" charset="0"/>
               <a:buNone/>
             </a:pPr>
-            <a:endParaRPr lang="es-MX" dirty="0"/>
+            <a:endParaRPr lang="es-MX"/>
           </a:p>
           <a:p>
             <a:pPr>
               <a:buNone/>
             </a:pPr>
             <a:r>
-              <a:rPr lang="es-MX" b="1" dirty="0" err="1"/>
+              <a:rPr lang="es-MX" b="1" err="1"/>
               <a:t>Identify</a:t>
             </a:r>
             <a:r>
-              <a:rPr lang="es-MX" b="1" dirty="0"/>
+              <a:rPr lang="es-MX" b="1"/>
               <a:t> </a:t>
             </a:r>
             <a:r>
-              <a:rPr lang="es-MX" b="1" dirty="0" err="1"/>
+              <a:rPr lang="es-MX" b="1" err="1"/>
               <a:t>Resources</a:t>
             </a:r>
-            <a:endParaRPr lang="es-MX" b="1" dirty="0"/>
+            <a:endParaRPr lang="es-MX" b="1"/>
           </a:p>
           <a:p>
             <a:pPr>
               <a:buNone/>
             </a:pPr>
-            <a:endParaRPr lang="es-MX" b="1" dirty="0"/>
+            <a:endParaRPr lang="es-MX" b="1"/>
           </a:p>
           <a:p>
             <a:pPr>
@@ -8392,11 +8721,11 @@
               <a:buChar char="•"/>
             </a:pPr>
             <a:r>
-              <a:rPr lang="es-MX" b="1" dirty="0"/>
+              <a:rPr lang="es-MX" b="1"/>
               <a:t>Objetivo:</a:t>
             </a:r>
             <a:r>
-              <a:rPr lang="es-MX" dirty="0"/>
+              <a:rPr lang="es-MX"/>
               <a:t> Identificar los recursos adecuados —humanos, tecnológicos y financieros— que serán necesarios durante la implementación.</a:t>
             </a:r>
           </a:p>
@@ -8406,11 +8735,11 @@
               <a:buChar char="•"/>
             </a:pPr>
             <a:r>
-              <a:rPr lang="es-MX" b="1" dirty="0"/>
+              <a:rPr lang="es-MX" b="1"/>
               <a:t>Valor:</a:t>
             </a:r>
             <a:r>
-              <a:rPr lang="es-MX" dirty="0"/>
+              <a:rPr lang="es-MX"/>
               <a:t> Permite asegurar que el equipo esté completo y disponible para el éxito del proyecto desde el inicio.</a:t>
             </a:r>
           </a:p>
@@ -8420,10 +8749,10 @@
               <a:buChar char="•"/>
             </a:pPr>
             <a:r>
-              <a:rPr lang="es-MX" b="1" dirty="0"/>
+              <a:rPr lang="es-MX" b="1"/>
               <a:t>Rol responsable:</a:t>
             </a:r>
-            <a:endParaRPr lang="es-MX" dirty="0"/>
+            <a:endParaRPr lang="es-MX"/>
           </a:p>
           <a:p>
             <a:pPr marL="742950" lvl="1" indent="-285750">
@@ -8431,7 +8760,7 @@
               <a:buChar char="•"/>
             </a:pPr>
             <a:r>
-              <a:rPr lang="es-MX" dirty="0"/>
+              <a:rPr lang="es-MX"/>
               <a:t>SPSS Project Manager</a:t>
             </a:r>
           </a:p>
@@ -8440,14 +8769,14 @@
               <a:buFont typeface="Arial" panose="020B0604020202020204" pitchFamily="34" charset="0"/>
               <a:buChar char="•"/>
             </a:pPr>
-            <a:endParaRPr lang="es-MX" dirty="0"/>
+            <a:endParaRPr lang="es-MX"/>
           </a:p>
           <a:p>
             <a:pPr>
               <a:buNone/>
             </a:pPr>
             <a:r>
-              <a:rPr lang="es-MX" b="1" dirty="0"/>
+              <a:rPr lang="es-MX" b="1"/>
               <a:t>Roles Involucrados y sus Aportes</a:t>
             </a:r>
           </a:p>
@@ -8455,29 +8784,29 @@
             <a:pPr>
               <a:buNone/>
             </a:pPr>
-            <a:endParaRPr lang="es-MX" b="1" dirty="0"/>
+            <a:endParaRPr lang="es-MX" b="1"/>
           </a:p>
           <a:p>
             <a:pPr>
               <a:buNone/>
             </a:pPr>
             <a:r>
-              <a:rPr lang="es-MX" b="1" dirty="0"/>
+              <a:rPr lang="es-MX" b="1"/>
               <a:t>Data </a:t>
             </a:r>
             <a:r>
-              <a:rPr lang="es-MX" b="1" dirty="0" err="1"/>
+              <a:rPr lang="es-MX" b="1" err="1"/>
               <a:t>Scientist</a:t>
             </a:r>
             <a:r>
-              <a:rPr lang="es-MX" b="1" dirty="0"/>
+              <a:rPr lang="es-MX" b="1"/>
               <a:t> / Data </a:t>
             </a:r>
             <a:r>
-              <a:rPr lang="es-MX" b="1" dirty="0" err="1"/>
+              <a:rPr lang="es-MX" b="1" err="1"/>
               <a:t>Miner</a:t>
             </a:r>
-            <a:endParaRPr lang="es-MX" b="1" dirty="0"/>
+            <a:endParaRPr lang="es-MX" b="1"/>
           </a:p>
           <a:p>
             <a:pPr>
@@ -8485,7 +8814,7 @@
               <a:buChar char="•"/>
             </a:pPr>
             <a:r>
-              <a:rPr lang="es-MX" dirty="0"/>
+              <a:rPr lang="es-MX"/>
               <a:t>Traduce los objetivos del negocio en soluciones analíticas.</a:t>
             </a:r>
           </a:p>
@@ -8495,7 +8824,7 @@
               <a:buChar char="•"/>
             </a:pPr>
             <a:r>
-              <a:rPr lang="es-MX" dirty="0"/>
+              <a:rPr lang="es-MX"/>
               <a:t>Construye y evalúa modelos.</a:t>
             </a:r>
           </a:p>
@@ -8505,7 +8834,7 @@
               <a:buChar char="•"/>
             </a:pPr>
             <a:r>
-              <a:rPr lang="es-MX" dirty="0"/>
+              <a:rPr lang="es-MX"/>
               <a:t>Colabora en las pruebas y despliegue de la solución.</a:t>
             </a:r>
           </a:p>
@@ -8514,21 +8843,21 @@
               <a:buFont typeface="Arial" panose="020B0604020202020204" pitchFamily="34" charset="0"/>
               <a:buNone/>
             </a:pPr>
-            <a:endParaRPr lang="es-MX" dirty="0"/>
+            <a:endParaRPr lang="es-MX"/>
           </a:p>
           <a:p>
             <a:pPr>
               <a:buNone/>
             </a:pPr>
             <a:r>
-              <a:rPr lang="es-MX" b="1" dirty="0"/>
+              <a:rPr lang="es-MX" b="1"/>
               <a:t>Enterprise </a:t>
             </a:r>
             <a:r>
-              <a:rPr lang="es-MX" b="1" dirty="0" err="1"/>
+              <a:rPr lang="es-MX" b="1" err="1"/>
               <a:t>Architect</a:t>
             </a:r>
-            <a:endParaRPr lang="es-MX" b="1" dirty="0"/>
+            <a:endParaRPr lang="es-MX" b="1"/>
           </a:p>
           <a:p>
             <a:pPr>
@@ -8536,7 +8865,7 @@
               <a:buChar char="•"/>
             </a:pPr>
             <a:r>
-              <a:rPr lang="es-MX" dirty="0"/>
+              <a:rPr lang="es-MX"/>
               <a:t>Diseña y valida la infraestructura técnica.</a:t>
             </a:r>
           </a:p>
@@ -8546,7 +8875,7 @@
               <a:buChar char="•"/>
             </a:pPr>
             <a:r>
-              <a:rPr lang="es-MX" dirty="0"/>
+              <a:rPr lang="es-MX"/>
               <a:t>Instala y configura IBM SPSS.</a:t>
             </a:r>
           </a:p>
@@ -8556,11 +8885,11 @@
               <a:buChar char="•"/>
             </a:pPr>
             <a:r>
-              <a:rPr lang="es-MX" dirty="0"/>
+              <a:rPr lang="es-MX"/>
               <a:t>Integra la solución con otros sistemas y ambientes.</a:t>
             </a:r>
             <a:r>
-              <a:rPr lang="es-MX" b="1" dirty="0"/>
+              <a:rPr lang="es-MX" b="1"/>
               <a:t> </a:t>
             </a:r>
           </a:p>
@@ -8569,7 +8898,7 @@
               <a:buFont typeface="Arial" panose="020B0604020202020204" pitchFamily="34" charset="0"/>
               <a:buNone/>
             </a:pPr>
-            <a:endParaRPr lang="es-MX" b="1" dirty="0"/>
+            <a:endParaRPr lang="es-MX" b="1"/>
           </a:p>
           <a:p>
             <a:pPr>
@@ -8577,7 +8906,7 @@
               <a:buNone/>
             </a:pPr>
             <a:r>
-              <a:rPr lang="es-MX" b="1" dirty="0"/>
+              <a:rPr lang="es-MX" b="1"/>
               <a:t>SPSS Project Manager</a:t>
             </a:r>
           </a:p>
@@ -8587,7 +8916,7 @@
               <a:buChar char="•"/>
             </a:pPr>
             <a:r>
-              <a:rPr lang="es-MX" dirty="0"/>
+              <a:rPr lang="es-MX"/>
               <a:t>Coordina el proyecto de principio a fin.</a:t>
             </a:r>
           </a:p>
@@ -8597,7 +8926,7 @@
               <a:buChar char="•"/>
             </a:pPr>
             <a:r>
-              <a:rPr lang="es-MX" dirty="0"/>
+              <a:rPr lang="es-MX"/>
               <a:t>Supervisa planificación, recursos, tiempos, costos y riesgos.</a:t>
             </a:r>
           </a:p>
@@ -8607,15 +8936,15 @@
               <a:buChar char="•"/>
             </a:pPr>
             <a:r>
-              <a:rPr lang="es-MX" dirty="0"/>
+              <a:rPr lang="es-MX"/>
               <a:t>Es el puente entre </a:t>
             </a:r>
             <a:r>
-              <a:rPr lang="es-MX" dirty="0" err="1"/>
+              <a:rPr lang="es-MX" err="1"/>
               <a:t>stakeholders</a:t>
             </a:r>
             <a:r>
-              <a:rPr lang="es-MX" dirty="0"/>
+              <a:rPr lang="es-MX"/>
               <a:t>, ventas y equipo técnico.</a:t>
             </a:r>
           </a:p>
@@ -8624,30 +8953,30 @@
               <a:buFont typeface="Arial" panose="020B0604020202020204" pitchFamily="34" charset="0"/>
               <a:buNone/>
             </a:pPr>
-            <a:endParaRPr lang="es-MX" dirty="0"/>
+            <a:endParaRPr lang="es-MX"/>
           </a:p>
           <a:p>
             <a:pPr>
               <a:buNone/>
             </a:pPr>
             <a:r>
-              <a:rPr lang="es-MX" b="1" dirty="0"/>
+              <a:rPr lang="es-MX" b="1"/>
               <a:t>Importancia de “Prepare </a:t>
             </a:r>
             <a:r>
-              <a:rPr lang="es-MX" b="1" dirty="0" err="1"/>
+              <a:rPr lang="es-MX" b="1" err="1"/>
               <a:t>for</a:t>
             </a:r>
             <a:r>
-              <a:rPr lang="es-MX" b="1" dirty="0"/>
+              <a:rPr lang="es-MX" b="1"/>
               <a:t> </a:t>
             </a:r>
             <a:r>
-              <a:rPr lang="es-MX" b="1" dirty="0" err="1"/>
+              <a:rPr lang="es-MX" b="1" err="1"/>
               <a:t>Implementation</a:t>
             </a:r>
             <a:r>
-              <a:rPr lang="es-MX" b="1" dirty="0"/>
+              <a:rPr lang="es-MX" b="1"/>
               <a:t>”</a:t>
             </a:r>
           </a:p>
@@ -8655,7 +8984,7 @@
             <a:pPr>
               <a:buNone/>
             </a:pPr>
-            <a:endParaRPr lang="es-MX" b="1" dirty="0"/>
+            <a:endParaRPr lang="es-MX" b="1"/>
           </a:p>
           <a:p>
             <a:pPr>
@@ -8663,15 +8992,15 @@
               <a:buChar char="•"/>
             </a:pPr>
             <a:r>
-              <a:rPr lang="es-MX" dirty="0"/>
+              <a:rPr lang="es-MX"/>
               <a:t>Establece las </a:t>
             </a:r>
             <a:r>
-              <a:rPr lang="es-MX" b="1" dirty="0"/>
+              <a:rPr lang="es-MX" b="1"/>
               <a:t>bases organizativas y técnicas</a:t>
             </a:r>
             <a:r>
-              <a:rPr lang="es-MX" dirty="0"/>
+              <a:rPr lang="es-MX"/>
               <a:t> para el proyecto.</a:t>
             </a:r>
           </a:p>
@@ -8681,15 +9010,15 @@
               <a:buChar char="•"/>
             </a:pPr>
             <a:r>
-              <a:rPr lang="es-MX" dirty="0"/>
+              <a:rPr lang="es-MX"/>
               <a:t>Permite una </a:t>
             </a:r>
             <a:r>
-              <a:rPr lang="es-MX" b="1" dirty="0"/>
+              <a:rPr lang="es-MX" b="1"/>
               <a:t>transición fluida entre la planificación y la ejecución</a:t>
             </a:r>
             <a:r>
-              <a:rPr lang="es-MX" dirty="0"/>
+              <a:rPr lang="es-MX"/>
               <a:t>.</a:t>
             </a:r>
           </a:p>
@@ -8699,7 +9028,7 @@
               <a:buChar char="•"/>
             </a:pPr>
             <a:r>
-              <a:rPr lang="es-MX" dirty="0"/>
+              <a:rPr lang="es-MX"/>
               <a:t>Reduce el riesgo de fallos por falta de claridad, recursos o coordinación.</a:t>
             </a:r>
           </a:p>
@@ -8709,20 +9038,20 @@
               <a:buChar char="•"/>
             </a:pPr>
             <a:r>
-              <a:rPr lang="es-MX" dirty="0"/>
+              <a:rPr lang="es-MX"/>
               <a:t>Alinea a todas las partes involucradas, asegurando </a:t>
             </a:r>
             <a:r>
-              <a:rPr lang="es-MX" b="1" dirty="0"/>
+              <a:rPr lang="es-MX" b="1"/>
               <a:t>transparencia y control</a:t>
             </a:r>
             <a:r>
-              <a:rPr lang="es-MX" dirty="0"/>
+              <a:rPr lang="es-MX"/>
               <a:t> desde el inicio.</a:t>
             </a:r>
           </a:p>
           <a:p>
-            <a:endParaRPr lang="es-CO" dirty="0"/>
+            <a:endParaRPr lang="es-CO"/>
           </a:p>
         </p:txBody>
       </p:sp>
@@ -8749,7 +9078,7 @@
               <a:pPr>
                 <a:defRPr/>
               </a:pPr>
-              <a:t>8</a:t>
+              <a:t>11</a:t>
             </a:fld>
             <a:endParaRPr lang="en-US"/>
           </a:p>
@@ -9778,7 +10107,7 @@
             <a:fld id="{0389DF86-9CF7-644A-ABC2-A5C2ED969516}" type="datetimeFigureOut">
               <a:rPr lang="es-CO" smtClean="0"/>
               <a:pPr/>
-              <a:t>24/06/2025</a:t>
+              <a:t>25/06/2025</a:t>
             </a:fld>
             <a:endParaRPr lang="es-CO"/>
           </a:p>
@@ -10149,7 +10478,7 @@
             <a:fld id="{0389DF86-9CF7-644A-ABC2-A5C2ED969516}" type="datetimeFigureOut">
               <a:rPr lang="es-CO" smtClean="0"/>
               <a:pPr/>
-              <a:t>24/06/2025</a:t>
+              <a:t>25/06/2025</a:t>
             </a:fld>
             <a:endParaRPr lang="es-CO"/>
           </a:p>
@@ -10838,7 +11167,7 @@
             <a:fld id="{0389DF86-9CF7-644A-ABC2-A5C2ED969516}" type="datetimeFigureOut">
               <a:rPr lang="es-CO" smtClean="0"/>
               <a:pPr/>
-              <a:t>24/06/2025</a:t>
+              <a:t>25/06/2025</a:t>
             </a:fld>
             <a:endParaRPr lang="es-CO"/>
           </a:p>
@@ -11796,7 +12125,7 @@
             <a:fld id="{0389DF86-9CF7-644A-ABC2-A5C2ED969516}" type="datetimeFigureOut">
               <a:rPr lang="es-CO" smtClean="0"/>
               <a:pPr/>
-              <a:t>24/06/2025</a:t>
+              <a:t>25/06/2025</a:t>
             </a:fld>
             <a:endParaRPr lang="es-CO"/>
           </a:p>
@@ -12614,7 +12943,7 @@
             <a:fld id="{0389DF86-9CF7-644A-ABC2-A5C2ED969516}" type="datetimeFigureOut">
               <a:rPr lang="es-CO" smtClean="0"/>
               <a:pPr/>
-              <a:t>24/06/2025</a:t>
+              <a:t>25/06/2025</a:t>
             </a:fld>
             <a:endParaRPr lang="es-CO"/>
           </a:p>
@@ -13206,10 +13535,10 @@
           </a:lstStyle>
           <a:p>
             <a:r>
-              <a:rPr lang="es-ES" dirty="0"/>
+              <a:rPr lang="es-ES"/>
               <a:t>Título de la diapositiva</a:t>
             </a:r>
-            <a:endParaRPr lang="es-CO" dirty="0"/>
+            <a:endParaRPr lang="es-CO"/>
           </a:p>
         </p:txBody>
       </p:sp>
@@ -13300,38 +13629,38 @@
           <a:p>
             <a:pPr lvl="0"/>
             <a:r>
-              <a:rPr lang="es-ES" dirty="0"/>
+              <a:rPr lang="es-ES"/>
               <a:t>Haga clic para modificar los estilos de texto del patrón</a:t>
             </a:r>
           </a:p>
           <a:p>
             <a:pPr lvl="1"/>
             <a:r>
-              <a:rPr lang="es-ES" dirty="0"/>
+              <a:rPr lang="es-ES"/>
               <a:t>Segundo nivel</a:t>
             </a:r>
           </a:p>
           <a:p>
             <a:pPr lvl="2"/>
             <a:r>
-              <a:rPr lang="es-ES" dirty="0"/>
+              <a:rPr lang="es-ES"/>
               <a:t>Tercer nivel</a:t>
             </a:r>
           </a:p>
           <a:p>
             <a:pPr lvl="3"/>
             <a:r>
-              <a:rPr lang="es-ES" dirty="0"/>
+              <a:rPr lang="es-ES"/>
               <a:t>Cuarto nivel</a:t>
             </a:r>
           </a:p>
           <a:p>
             <a:pPr lvl="4"/>
             <a:r>
-              <a:rPr lang="es-ES" dirty="0"/>
+              <a:rPr lang="es-ES"/>
               <a:t>Quinto nivel</a:t>
             </a:r>
-            <a:endParaRPr lang="es-CO" dirty="0"/>
+            <a:endParaRPr lang="es-CO"/>
           </a:p>
         </p:txBody>
       </p:sp>
@@ -13418,7 +13747,7 @@
             <a:fld id="{0389DF86-9CF7-644A-ABC2-A5C2ED969516}" type="datetimeFigureOut">
               <a:rPr lang="es-CO" smtClean="0"/>
               <a:pPr/>
-              <a:t>24/06/2025</a:t>
+              <a:t>25/06/2025</a:t>
             </a:fld>
             <a:endParaRPr lang="es-CO"/>
           </a:p>
@@ -13453,7 +13782,7 @@
             </a:lvl1pPr>
           </a:lstStyle>
           <a:p>
-            <a:endParaRPr lang="es-CO" dirty="0"/>
+            <a:endParaRPr lang="es-CO"/>
           </a:p>
         </p:txBody>
       </p:sp>
@@ -13722,10 +14051,10 @@
           </a:lstStyle>
           <a:p>
             <a:r>
-              <a:rPr lang="es-ES" dirty="0"/>
+              <a:rPr lang="es-ES"/>
               <a:t>Título de la diapositiva</a:t>
             </a:r>
-            <a:endParaRPr lang="es-CO" dirty="0"/>
+            <a:endParaRPr lang="es-CO"/>
           </a:p>
         </p:txBody>
       </p:sp>
@@ -13816,38 +14145,38 @@
           <a:p>
             <a:pPr lvl="0"/>
             <a:r>
-              <a:rPr lang="es-ES" dirty="0"/>
+              <a:rPr lang="es-ES"/>
               <a:t>Haga clic para modificar los estilos de texto del patrón</a:t>
             </a:r>
           </a:p>
           <a:p>
             <a:pPr lvl="1"/>
             <a:r>
-              <a:rPr lang="es-ES" dirty="0"/>
+              <a:rPr lang="es-ES"/>
               <a:t>Segundo nivel</a:t>
             </a:r>
           </a:p>
           <a:p>
             <a:pPr lvl="2"/>
             <a:r>
-              <a:rPr lang="es-ES" dirty="0"/>
+              <a:rPr lang="es-ES"/>
               <a:t>Tercer nivel</a:t>
             </a:r>
           </a:p>
           <a:p>
             <a:pPr lvl="3"/>
             <a:r>
-              <a:rPr lang="es-ES" dirty="0"/>
+              <a:rPr lang="es-ES"/>
               <a:t>Cuarto nivel</a:t>
             </a:r>
           </a:p>
           <a:p>
             <a:pPr lvl="4"/>
             <a:r>
-              <a:rPr lang="es-ES" dirty="0"/>
+              <a:rPr lang="es-ES"/>
               <a:t>Quinto nivel</a:t>
             </a:r>
-            <a:endParaRPr lang="es-CO" dirty="0"/>
+            <a:endParaRPr lang="es-CO"/>
           </a:p>
         </p:txBody>
       </p:sp>
@@ -14174,7 +14503,7 @@
             <a:fld id="{0389DF86-9CF7-644A-ABC2-A5C2ED969516}" type="datetimeFigureOut">
               <a:rPr lang="es-CO" smtClean="0"/>
               <a:pPr/>
-              <a:t>24/06/2025</a:t>
+              <a:t>25/06/2025</a:t>
             </a:fld>
             <a:endParaRPr lang="es-CO"/>
           </a:p>
@@ -14351,7 +14680,7 @@
             <a:fld id="{0389DF86-9CF7-644A-ABC2-A5C2ED969516}" type="datetimeFigureOut">
               <a:rPr lang="es-CO" smtClean="0"/>
               <a:pPr/>
-              <a:t>24/06/2025</a:t>
+              <a:t>25/06/2025</a:t>
             </a:fld>
             <a:endParaRPr lang="es-CO"/>
           </a:p>
@@ -16916,10 +17245,10 @@
           <a:lstStyle/>
           <a:p>
             <a:r>
-              <a:rPr lang="es-ES" dirty="0"/>
+              <a:rPr lang="es-ES"/>
               <a:t>Haga clic para modificar el estilo de título del patrón</a:t>
             </a:r>
-            <a:endParaRPr lang="es-CO" dirty="0"/>
+            <a:endParaRPr lang="es-CO"/>
           </a:p>
         </p:txBody>
       </p:sp>
@@ -17749,7 +18078,7 @@
             <a:fld id="{0389DF86-9CF7-644A-ABC2-A5C2ED969516}" type="datetimeFigureOut">
               <a:rPr lang="es-CO" smtClean="0"/>
               <a:pPr/>
-              <a:t>24/06/2025</a:t>
+              <a:t>25/06/2025</a:t>
             </a:fld>
             <a:endParaRPr lang="es-CO"/>
           </a:p>
@@ -18146,10 +18475,10 @@
           <a:lstStyle/>
           <a:p>
             <a:r>
-              <a:rPr lang="es-MX" sz="2400" dirty="0"/>
+              <a:rPr lang="es-MX" sz="2400"/>
               <a:t>Pronóstico de la Demanda para Productos de Vida Útil Corta, en la categoría de líquidos, en una Empresa B2B de Derivados Lácteos </a:t>
             </a:r>
-            <a:endParaRPr lang="es-CO" sz="2800" b="1" dirty="0"/>
+            <a:endParaRPr lang="es-CO" sz="2800" b="1"/>
           </a:p>
         </p:txBody>
       </p:sp>
@@ -18181,7 +18510,7 @@
           <a:p>
             <a:pPr marL="455295" indent="-455295"/>
             <a:r>
-              <a:rPr lang="es-CO" sz="1200" dirty="0">
+              <a:rPr lang="es-CO" sz="1200">
                 <a:ea typeface="ＭＳ Ｐゴシック"/>
               </a:rPr>
               <a:t>Cano, Andrés</a:t>
@@ -18190,7 +18519,7 @@
           <a:p>
             <a:pPr marL="455295" indent="-455295"/>
             <a:r>
-              <a:rPr lang="es-CO" sz="1200" dirty="0">
+              <a:rPr lang="es-CO" sz="1200">
                 <a:solidFill>
                   <a:schemeClr val="tx1"/>
                 </a:solidFill>
@@ -18202,18 +18531,18 @@
           <a:p>
             <a:pPr marL="455295" indent="-455295"/>
             <a:r>
-              <a:rPr lang="es-CO" sz="1200" dirty="0">
+              <a:rPr lang="es-CO" sz="1200">
                 <a:ea typeface="ＭＳ Ｐゴシック"/>
               </a:rPr>
               <a:t>Reales, </a:t>
             </a:r>
             <a:r>
-              <a:rPr lang="es-CO" sz="1200" dirty="0" err="1">
+              <a:rPr lang="es-CO" sz="1200" err="1">
                 <a:ea typeface="ＭＳ Ｐゴシック"/>
               </a:rPr>
               <a:t>Jhonattan</a:t>
             </a:r>
-            <a:endParaRPr lang="es-CO" sz="1200" dirty="0">
+            <a:endParaRPr lang="es-CO" sz="1200">
               <a:solidFill>
                 <a:schemeClr val="tx1"/>
               </a:solidFill>
@@ -18225,6 +18554,805 @@
     <p:extLst>
       <p:ext uri="{BB962C8B-B14F-4D97-AF65-F5344CB8AC3E}">
         <p14:creationId xmlns:p14="http://schemas.microsoft.com/office/powerpoint/2010/main" val="3933783772"/>
+      </p:ext>
+    </p:extLst>
+  </p:cSld>
+  <p:clrMapOvr>
+    <a:masterClrMapping/>
+  </p:clrMapOvr>
+</p:sld>
+</file>
+
+<file path=ppt/slides/slide10.xml><?xml version="1.0" encoding="utf-8"?>
+<p:sld xmlns:a="http://schemas.openxmlformats.org/drawingml/2006/main" xmlns:r="http://schemas.openxmlformats.org/officeDocument/2006/relationships" xmlns:p="http://schemas.openxmlformats.org/presentationml/2006/main">
+  <p:cSld>
+    <p:spTree>
+      <p:nvGrpSpPr>
+        <p:cNvPr id="1" name=""/>
+        <p:cNvGrpSpPr/>
+        <p:nvPr/>
+      </p:nvGrpSpPr>
+      <p:grpSpPr>
+        <a:xfrm>
+          <a:off x="0" y="0"/>
+          <a:ext cx="0" cy="0"/>
+          <a:chOff x="0" y="0"/>
+          <a:chExt cx="0" cy="0"/>
+        </a:xfrm>
+      </p:grpSpPr>
+      <p:sp>
+        <p:nvSpPr>
+          <p:cNvPr id="2" name="Marcador de fecha 1">
+            <a:extLst>
+              <a:ext uri="{FF2B5EF4-FFF2-40B4-BE49-F238E27FC236}">
+                <a16:creationId xmlns:a16="http://schemas.microsoft.com/office/drawing/2014/main" id="{1EAABA7F-569F-F6A0-2759-5932EF9367DA}"/>
+              </a:ext>
+            </a:extLst>
+          </p:cNvPr>
+          <p:cNvSpPr>
+            <a:spLocks noGrp="1"/>
+          </p:cNvSpPr>
+          <p:nvPr>
+            <p:ph type="dt" sz="half" idx="10"/>
+          </p:nvPr>
+        </p:nvSpPr>
+        <p:spPr/>
+        <p:txBody>
+          <a:bodyPr/>
+          <a:lstStyle/>
+          <a:p>
+            <a:fld id="{01A94EE0-64C1-49D5-A661-132B82D83D38}" type="datetime1">
+              <a:t>6/25/2025</a:t>
+            </a:fld>
+            <a:endParaRPr lang="es-CO"/>
+          </a:p>
+        </p:txBody>
+      </p:sp>
+      <p:sp>
+        <p:nvSpPr>
+          <p:cNvPr id="3" name="Marcador de pie de página 2">
+            <a:extLst>
+              <a:ext uri="{FF2B5EF4-FFF2-40B4-BE49-F238E27FC236}">
+                <a16:creationId xmlns:a16="http://schemas.microsoft.com/office/drawing/2014/main" id="{CE7B62D9-F637-80FE-8E7A-FB604C55CF5F}"/>
+              </a:ext>
+            </a:extLst>
+          </p:cNvPr>
+          <p:cNvSpPr>
+            <a:spLocks noGrp="1"/>
+          </p:cNvSpPr>
+          <p:nvPr>
+            <p:ph type="ftr" sz="quarter" idx="11"/>
+          </p:nvPr>
+        </p:nvSpPr>
+        <p:spPr/>
+        <p:txBody>
+          <a:bodyPr/>
+          <a:lstStyle/>
+          <a:p>
+            <a:endParaRPr lang="es-CO"/>
+          </a:p>
+        </p:txBody>
+      </p:sp>
+      <p:sp>
+        <p:nvSpPr>
+          <p:cNvPr id="4" name="Marcador de texto 3">
+            <a:extLst>
+              <a:ext uri="{FF2B5EF4-FFF2-40B4-BE49-F238E27FC236}">
+                <a16:creationId xmlns:a16="http://schemas.microsoft.com/office/drawing/2014/main" id="{D0F84C1F-172E-B35F-5695-6476FD46AD9C}"/>
+              </a:ext>
+            </a:extLst>
+          </p:cNvPr>
+          <p:cNvSpPr>
+            <a:spLocks noGrp="1"/>
+          </p:cNvSpPr>
+          <p:nvPr>
+            <p:ph type="body" sz="quarter" idx="12"/>
+          </p:nvPr>
+        </p:nvSpPr>
+        <p:spPr>
+          <a:xfrm>
+            <a:off x="213362" y="1614268"/>
+            <a:ext cx="11371383" cy="4333552"/>
+          </a:xfrm>
+        </p:spPr>
+        <p:txBody>
+          <a:bodyPr lIns="91440" tIns="45720" rIns="91440" bIns="45720" anchor="t"/>
+          <a:lstStyle/>
+          <a:p>
+            <a:pPr algn="just"/>
+            <a:endParaRPr lang="es-ES" sz="4000">
+              <a:latin typeface="Arial"/>
+              <a:cs typeface="Arial"/>
+            </a:endParaRPr>
+          </a:p>
+          <a:p>
+            <a:pPr marL="285750" indent="-285750" algn="just">
+              <a:buChar char="•"/>
+            </a:pPr>
+            <a:r>
+              <a:rPr lang="es-CO" sz="1400">
+                <a:latin typeface="Arial"/>
+                <a:cs typeface="Arial"/>
+              </a:rPr>
+              <a:t>Asumiendo un escenario de “underforecasting” donde el forecast es mucho menor que la demanda, se plantea el siguiente ejercicio como potencial impacto al proceso de todo el portafolio de líquidos en términos de ingresos por ventas:</a:t>
+            </a:r>
+            <a:endParaRPr lang="es-ES" sz="1400">
+              <a:latin typeface="Arial"/>
+              <a:cs typeface="Arial"/>
+            </a:endParaRPr>
+          </a:p>
+          <a:p>
+            <a:pPr algn="just"/>
+            <a:r>
+              <a:rPr lang="es-CO" sz="1400">
+                <a:latin typeface="Arial"/>
+                <a:cs typeface="Arial"/>
+              </a:rPr>
+              <a:t>Si de 154 de unidades en pedidos por semana, el forecast solo fue de 100 (Error 35% - Error Actual), estan en riesgo 54 unidades facturables. Considerando un precio de $100 por SKU se estarían dejando de facturar $5.400. Sin embargo, si se tiene un modelo con el 7% de error, es decir, 7 unidades en riesgo de facturación, se estarían dejando de facturar $700. Al comparar $5.400 del escenario actual vs $700 con los pronósticos generados en este estudio, se puede observar que hay una reducción de la pérdida de ingresos por ventas de alrededor el 87%.</a:t>
+            </a:r>
+            <a:endParaRPr lang="es-ES" sz="1400">
+              <a:latin typeface="Arial"/>
+              <a:cs typeface="Arial"/>
+            </a:endParaRPr>
+          </a:p>
+          <a:p>
+            <a:endParaRPr lang="es-ES" sz="1400">
+              <a:latin typeface="Arial"/>
+              <a:cs typeface="Arial"/>
+            </a:endParaRPr>
+          </a:p>
+          <a:p>
+            <a:endParaRPr lang="es-ES" sz="1400">
+              <a:latin typeface="Arial"/>
+              <a:cs typeface="Arial"/>
+            </a:endParaRPr>
+          </a:p>
+          <a:p>
+            <a:pPr marL="285750" indent="-285750">
+              <a:buChar char="•"/>
+            </a:pPr>
+            <a:r>
+              <a:rPr lang="es-ES" sz="1400">
+                <a:solidFill>
+                  <a:srgbClr val="393939"/>
+                </a:solidFill>
+                <a:latin typeface="Arial"/>
+                <a:cs typeface="Arial"/>
+              </a:rPr>
+              <a:t>Por otro lado, en un escenario de “Overforecasting” donde el forecast supera la demanda se tiene la siguiente simulación: </a:t>
+            </a:r>
+          </a:p>
+          <a:p>
+            <a:r>
+              <a:rPr lang="es-ES" sz="1400">
+                <a:solidFill>
+                  <a:srgbClr val="393939"/>
+                </a:solidFill>
+                <a:latin typeface="Arial"/>
+                <a:cs typeface="Arial"/>
+              </a:rPr>
+              <a:t>Para un forecast de 100 unidades vs pedidos de 74 unidades (Error 35% - Error Actual) se tienen en potencial riesgo de producto fecha corta alrededor de 26 unidades que si se asume un costo de $10 se podria estar hablando de una baja de $260. Sin embargo, si se tiene un error del 7%, alrededor de 7 unidades en riesgo de esta por fuera de la política de recibo del cliente y por ende un riesgo de baja para la compañía se estaría habalndo de solo una potencial perdida de $70. Lo anterior significa una reducción del 73% del riesgo de dar de baja inventario.</a:t>
+            </a:r>
+            <a:endParaRPr lang="es-ES"/>
+          </a:p>
+        </p:txBody>
+      </p:sp>
+      <p:sp>
+        <p:nvSpPr>
+          <p:cNvPr id="5" name="Título 4">
+            <a:extLst>
+              <a:ext uri="{FF2B5EF4-FFF2-40B4-BE49-F238E27FC236}">
+                <a16:creationId xmlns:a16="http://schemas.microsoft.com/office/drawing/2014/main" id="{D5A2D749-1616-6F3F-B36A-960236F3677D}"/>
+              </a:ext>
+            </a:extLst>
+          </p:cNvPr>
+          <p:cNvSpPr>
+            <a:spLocks noGrp="1"/>
+          </p:cNvSpPr>
+          <p:nvPr>
+            <p:ph type="title"/>
+          </p:nvPr>
+        </p:nvSpPr>
+        <p:spPr/>
+        <p:txBody>
+          <a:bodyPr lIns="91440" tIns="45720" rIns="91440" bIns="45720" anchor="t"/>
+          <a:lstStyle/>
+          <a:p>
+            <a:r>
+              <a:rPr lang="es-ES">
+                <a:cs typeface="Arial"/>
+              </a:rPr>
+              <a:t>SIMULACIÓN DEL IMPACTO DEL MODELO </a:t>
+            </a:r>
+            <a:endParaRPr lang="es-ES"/>
+          </a:p>
+        </p:txBody>
+      </p:sp>
+    </p:spTree>
+    <p:extLst>
+      <p:ext uri="{BB962C8B-B14F-4D97-AF65-F5344CB8AC3E}">
+        <p14:creationId xmlns:p14="http://schemas.microsoft.com/office/powerpoint/2010/main" val="3566481741"/>
+      </p:ext>
+    </p:extLst>
+  </p:cSld>
+  <p:clrMapOvr>
+    <a:masterClrMapping/>
+  </p:clrMapOvr>
+</p:sld>
+</file>
+
+<file path=ppt/slides/slide11.xml><?xml version="1.0" encoding="utf-8"?>
+<p:sld xmlns:a="http://schemas.openxmlformats.org/drawingml/2006/main" xmlns:r="http://schemas.openxmlformats.org/officeDocument/2006/relationships" xmlns:p="http://schemas.openxmlformats.org/presentationml/2006/main">
+  <p:cSld>
+    <p:spTree>
+      <p:nvGrpSpPr>
+        <p:cNvPr id="1" name=""/>
+        <p:cNvGrpSpPr/>
+        <p:nvPr/>
+      </p:nvGrpSpPr>
+      <p:grpSpPr>
+        <a:xfrm>
+          <a:off x="0" y="0"/>
+          <a:ext cx="0" cy="0"/>
+          <a:chOff x="0" y="0"/>
+          <a:chExt cx="0" cy="0"/>
+        </a:xfrm>
+      </p:grpSpPr>
+      <p:sp>
+        <p:nvSpPr>
+          <p:cNvPr id="2" name="Marcador de fecha 1">
+            <a:extLst>
+              <a:ext uri="{FF2B5EF4-FFF2-40B4-BE49-F238E27FC236}">
+                <a16:creationId xmlns:a16="http://schemas.microsoft.com/office/drawing/2014/main" id="{54D654DE-AD2E-B544-B68B-3EFFBA8ED140}"/>
+              </a:ext>
+            </a:extLst>
+          </p:cNvPr>
+          <p:cNvSpPr>
+            <a:spLocks noGrp="1"/>
+          </p:cNvSpPr>
+          <p:nvPr>
+            <p:ph type="dt" sz="half" idx="10"/>
+          </p:nvPr>
+        </p:nvSpPr>
+        <p:spPr/>
+        <p:txBody>
+          <a:bodyPr/>
+          <a:lstStyle/>
+          <a:p>
+            <a:fld id="{431D2F23-CF27-BF49-B983-496F0892B909}" type="datetime1">
+              <a:rPr lang="es-CO" smtClean="0"/>
+              <a:t>25/06/2025</a:t>
+            </a:fld>
+            <a:endParaRPr lang="es-CO"/>
+          </a:p>
+        </p:txBody>
+      </p:sp>
+      <p:sp>
+        <p:nvSpPr>
+          <p:cNvPr id="7" name="CuadroTexto 6">
+            <a:extLst>
+              <a:ext uri="{FF2B5EF4-FFF2-40B4-BE49-F238E27FC236}">
+                <a16:creationId xmlns:a16="http://schemas.microsoft.com/office/drawing/2014/main" id="{91F33DDB-060A-DDB9-B494-7F506604D8C4}"/>
+              </a:ext>
+            </a:extLst>
+          </p:cNvPr>
+          <p:cNvSpPr txBox="1"/>
+          <p:nvPr/>
+        </p:nvSpPr>
+        <p:spPr>
+          <a:xfrm>
+            <a:off x="1019034" y="5529911"/>
+            <a:ext cx="10163789" cy="830997"/>
+          </a:xfrm>
+          <a:prstGeom prst="rect">
+            <a:avLst/>
+          </a:prstGeom>
+          <a:noFill/>
+        </p:spPr>
+        <p:txBody>
+          <a:bodyPr wrap="square" lIns="91440" tIns="45720" rIns="91440" bIns="45720" anchor="t">
+            <a:spAutoFit/>
+          </a:bodyPr>
+          <a:lstStyle/>
+          <a:p>
+            <a:pPr marL="0" marR="0" lvl="0" indent="0" algn="ctr" defTabSz="914400" rtl="0" eaLnBrk="0" fontAlgn="base" latinLnBrk="0" hangingPunct="0">
+              <a:lnSpc>
+                <a:spcPct val="100000"/>
+              </a:lnSpc>
+              <a:spcBef>
+                <a:spcPct val="0"/>
+              </a:spcBef>
+              <a:spcAft>
+                <a:spcPct val="0"/>
+              </a:spcAft>
+              <a:buClrTx/>
+              <a:buSzTx/>
+              <a:buFontTx/>
+              <a:buChar char="•"/>
+              <a:tabLst/>
+            </a:pPr>
+            <a:endParaRPr lang="es-CO" altLang="es-CO" sz="2400" b="1">
+              <a:solidFill>
+                <a:srgbClr val="020B0F"/>
+              </a:solidFill>
+              <a:latin typeface="Arial" panose="020B0604020202020204" pitchFamily="34" charset="0"/>
+            </a:endParaRPr>
+          </a:p>
+          <a:p>
+            <a:pPr algn="ctr" defTabSz="914400" eaLnBrk="0" hangingPunct="0"/>
+            <a:r>
+              <a:rPr lang="es-ES" altLang="es-CO" sz="2400" b="1">
+                <a:solidFill>
+                  <a:srgbClr val="5454E9"/>
+                </a:solidFill>
+                <a:latin typeface="+mj-lt"/>
+                <a:ea typeface="+mj-lt"/>
+                <a:cs typeface="+mj-lt"/>
+              </a:rPr>
+              <a:t>CONCLUSIONES Y RECOMENDACIONES</a:t>
+            </a:r>
+            <a:endParaRPr lang="es-CO" altLang="es-CO" sz="2400" b="1">
+              <a:solidFill>
+                <a:srgbClr val="5454E9"/>
+              </a:solidFill>
+              <a:latin typeface="+mj-lt"/>
+              <a:ea typeface="+mj-lt"/>
+              <a:cs typeface="+mj-lt"/>
+            </a:endParaRPr>
+          </a:p>
+        </p:txBody>
+      </p:sp>
+      <p:graphicFrame>
+        <p:nvGraphicFramePr>
+          <p:cNvPr id="8" name="Marcador de contenido 2">
+            <a:extLst>
+              <a:ext uri="{FF2B5EF4-FFF2-40B4-BE49-F238E27FC236}">
+                <a16:creationId xmlns:a16="http://schemas.microsoft.com/office/drawing/2014/main" id="{135D3F68-F84D-AD30-116B-D226C7F1AA89}"/>
+              </a:ext>
+            </a:extLst>
+          </p:cNvPr>
+          <p:cNvGraphicFramePr>
+            <a:graphicFrameLocks/>
+          </p:cNvGraphicFramePr>
+          <p:nvPr>
+            <p:extLst>
+              <p:ext uri="{D42A27DB-BD31-4B8C-83A1-F6EECF244321}">
+                <p14:modId xmlns:p14="http://schemas.microsoft.com/office/powerpoint/2010/main" val="2911355453"/>
+              </p:ext>
+            </p:extLst>
+          </p:nvPr>
+        </p:nvGraphicFramePr>
+        <p:xfrm>
+          <a:off x="1447368" y="122877"/>
+          <a:ext cx="10043017" cy="5415284"/>
+        </p:xfrm>
+        <a:graphic>
+          <a:graphicData uri="http://schemas.openxmlformats.org/drawingml/2006/diagram">
+            <dgm:relIds xmlns:dgm="http://schemas.openxmlformats.org/drawingml/2006/diagram" xmlns:r="http://schemas.openxmlformats.org/officeDocument/2006/relationships" r:dm="rId3" r:lo="rId4" r:qs="rId5" r:cs="rId6"/>
+          </a:graphicData>
+        </a:graphic>
+      </p:graphicFrame>
+      <p:sp>
+        <p:nvSpPr>
+          <p:cNvPr id="18" name="CuadroTexto 17">
+            <a:extLst>
+              <a:ext uri="{FF2B5EF4-FFF2-40B4-BE49-F238E27FC236}">
+                <a16:creationId xmlns:a16="http://schemas.microsoft.com/office/drawing/2014/main" id="{273B7855-D416-328B-EEB6-2C5FAEFCD22E}"/>
+              </a:ext>
+            </a:extLst>
+          </p:cNvPr>
+          <p:cNvSpPr txBox="1"/>
+          <p:nvPr/>
+        </p:nvSpPr>
+        <p:spPr>
+          <a:xfrm>
+            <a:off x="2847609" y="907755"/>
+            <a:ext cx="2743200" cy="1384995"/>
+          </a:xfrm>
+          <a:prstGeom prst="rect">
+            <a:avLst/>
+          </a:prstGeom>
+          <a:noFill/>
+        </p:spPr>
+        <p:txBody>
+          <a:bodyPr rot="0" spcFirstLastPara="0" vertOverflow="overflow" horzOverflow="overflow" vert="horz" wrap="square" lIns="91440" tIns="45720" rIns="91440" bIns="45720" numCol="1" spcCol="0" rtlCol="0" fromWordArt="0" anchor="t" anchorCtr="0" forceAA="0" compatLnSpc="1">
+            <a:prstTxWarp prst="textNoShape">
+              <a:avLst/>
+            </a:prstTxWarp>
+            <a:spAutoFit/>
+          </a:bodyPr>
+          <a:lstStyle/>
+          <a:p>
+            <a:pPr algn="just"/>
+            <a:r>
+              <a:rPr lang="es-CO" sz="1200">
+                <a:solidFill>
+                  <a:srgbClr val="020B0F"/>
+                </a:solidFill>
+                <a:latin typeface="Arial"/>
+                <a:ea typeface="ＭＳ Ｐゴシック"/>
+                <a:cs typeface="Arial"/>
+              </a:rPr>
+              <a:t>Se desarrolló e implementó un enfoque híbrido de pronóstico que combina modelos estadísticos clásicos y modelos de aprendizaje automático, ajustado a la naturaleza irregular de la demanda de productos líquidos perecederos.</a:t>
+            </a:r>
+            <a:r>
+              <a:rPr lang="es-ES" sz="1200">
+                <a:solidFill>
+                  <a:srgbClr val="020B0F"/>
+                </a:solidFill>
+                <a:latin typeface="Arial"/>
+                <a:ea typeface="ＭＳ Ｐゴシック"/>
+                <a:cs typeface="Arial"/>
+              </a:rPr>
+              <a:t> </a:t>
+            </a:r>
+            <a:endParaRPr lang="es-ES" sz="1200">
+              <a:solidFill>
+                <a:srgbClr val="020B0F"/>
+              </a:solidFill>
+              <a:cs typeface="Arial"/>
+            </a:endParaRPr>
+          </a:p>
+        </p:txBody>
+      </p:sp>
+      <p:sp>
+        <p:nvSpPr>
+          <p:cNvPr id="19" name="CuadroTexto 18">
+            <a:extLst>
+              <a:ext uri="{FF2B5EF4-FFF2-40B4-BE49-F238E27FC236}">
+                <a16:creationId xmlns:a16="http://schemas.microsoft.com/office/drawing/2014/main" id="{A644A3BB-1113-3554-CF02-ED8AC76D3C51}"/>
+              </a:ext>
+            </a:extLst>
+          </p:cNvPr>
+          <p:cNvSpPr txBox="1"/>
+          <p:nvPr/>
+        </p:nvSpPr>
+        <p:spPr>
+          <a:xfrm>
+            <a:off x="7296230" y="798106"/>
+            <a:ext cx="2743200" cy="1615827"/>
+          </a:xfrm>
+          <a:prstGeom prst="rect">
+            <a:avLst/>
+          </a:prstGeom>
+          <a:noFill/>
+        </p:spPr>
+        <p:txBody>
+          <a:bodyPr rot="0" spcFirstLastPara="0" vertOverflow="overflow" horzOverflow="overflow" vert="horz" wrap="square" lIns="91440" tIns="45720" rIns="91440" bIns="45720" numCol="1" spcCol="0" rtlCol="0" fromWordArt="0" anchor="t" anchorCtr="0" forceAA="0" compatLnSpc="1">
+            <a:prstTxWarp prst="textNoShape">
+              <a:avLst/>
+            </a:prstTxWarp>
+            <a:spAutoFit/>
+          </a:bodyPr>
+          <a:lstStyle/>
+          <a:p>
+            <a:pPr algn="just"/>
+            <a:r>
+              <a:rPr lang="es-CO" sz="1100">
+                <a:solidFill>
+                  <a:srgbClr val="020B0F"/>
+                </a:solidFill>
+                <a:latin typeface="Arial"/>
+                <a:ea typeface="ＭＳ Ｐゴシック"/>
+                <a:cs typeface="Arial"/>
+              </a:rPr>
+              <a:t>El sistema de clasificación de demanda y selección automatizada de modelos por SKU permitió alcanzar un MAPE promedio de 6.82%, superando el objetivo de negocio establecido.</a:t>
+            </a:r>
+            <a:r>
+              <a:rPr lang="es-ES" sz="1100">
+                <a:solidFill>
+                  <a:srgbClr val="020B0F"/>
+                </a:solidFill>
+                <a:latin typeface="Arial"/>
+                <a:ea typeface="ＭＳ Ｐゴシック"/>
+                <a:cs typeface="Arial"/>
+              </a:rPr>
+              <a:t> </a:t>
+            </a:r>
+          </a:p>
+          <a:p>
+            <a:pPr algn="just"/>
+            <a:r>
+              <a:rPr lang="es-ES" sz="1100">
+                <a:solidFill>
+                  <a:srgbClr val="020B0F"/>
+                </a:solidFill>
+                <a:latin typeface="Arial"/>
+                <a:ea typeface="ＭＳ Ｐゴシック"/>
+                <a:cs typeface="Arial"/>
+              </a:rPr>
+              <a:t>Existe una potencial mejora en la reducción en la perdida de ingresos por ventas en escenarios de underforecasting del 87%.</a:t>
+            </a:r>
+          </a:p>
+        </p:txBody>
+      </p:sp>
+      <p:sp>
+        <p:nvSpPr>
+          <p:cNvPr id="50" name="CuadroTexto 49">
+            <a:extLst>
+              <a:ext uri="{FF2B5EF4-FFF2-40B4-BE49-F238E27FC236}">
+                <a16:creationId xmlns:a16="http://schemas.microsoft.com/office/drawing/2014/main" id="{197C8E89-8828-BA4E-C47A-4B214610BD89}"/>
+              </a:ext>
+            </a:extLst>
+          </p:cNvPr>
+          <p:cNvSpPr txBox="1"/>
+          <p:nvPr/>
+        </p:nvSpPr>
+        <p:spPr>
+          <a:xfrm>
+            <a:off x="2847608" y="3429665"/>
+            <a:ext cx="2743200" cy="1277273"/>
+          </a:xfrm>
+          <a:prstGeom prst="rect">
+            <a:avLst/>
+          </a:prstGeom>
+          <a:noFill/>
+        </p:spPr>
+        <p:txBody>
+          <a:bodyPr rot="0" spcFirstLastPara="0" vertOverflow="overflow" horzOverflow="overflow" vert="horz" wrap="square" lIns="91440" tIns="45720" rIns="91440" bIns="45720" numCol="1" spcCol="0" rtlCol="0" fromWordArt="0" anchor="t" anchorCtr="0" forceAA="0" compatLnSpc="1">
+            <a:prstTxWarp prst="textNoShape">
+              <a:avLst/>
+            </a:prstTxWarp>
+            <a:spAutoFit/>
+          </a:bodyPr>
+          <a:lstStyle/>
+          <a:p>
+            <a:pPr algn="just"/>
+            <a:r>
+              <a:rPr lang="es-CO" sz="1100">
+                <a:solidFill>
+                  <a:srgbClr val="020B0F"/>
+                </a:solidFill>
+                <a:latin typeface="Times New Roman"/>
+                <a:ea typeface="ＭＳ Ｐゴシック"/>
+                <a:cs typeface="Times New Roman"/>
+              </a:rPr>
+              <a:t>El modelo Holt-</a:t>
+            </a:r>
+            <a:r>
+              <a:rPr lang="es-CO" sz="1100" err="1">
+                <a:solidFill>
+                  <a:srgbClr val="020B0F"/>
+                </a:solidFill>
+                <a:latin typeface="Times New Roman"/>
+                <a:ea typeface="ＭＳ Ｐゴシック"/>
+                <a:cs typeface="Times New Roman"/>
+              </a:rPr>
+              <a:t>Winters</a:t>
+            </a:r>
+            <a:r>
+              <a:rPr lang="es-CO" sz="1100">
+                <a:solidFill>
+                  <a:srgbClr val="020B0F"/>
+                </a:solidFill>
+                <a:latin typeface="Times New Roman"/>
+                <a:ea typeface="ＭＳ Ｐゴシック"/>
+                <a:cs typeface="Times New Roman"/>
+              </a:rPr>
+              <a:t> fue el más recurrente, pero se comprobó que modelos como </a:t>
+            </a:r>
+            <a:r>
+              <a:rPr lang="es-CO" sz="1100" err="1">
+                <a:solidFill>
+                  <a:srgbClr val="020B0F"/>
+                </a:solidFill>
+                <a:latin typeface="Times New Roman"/>
+                <a:ea typeface="ＭＳ Ｐゴシック"/>
+                <a:cs typeface="Times New Roman"/>
+              </a:rPr>
+              <a:t>ElasticNet</a:t>
+            </a:r>
+            <a:r>
+              <a:rPr lang="es-CO" sz="1100">
+                <a:solidFill>
+                  <a:srgbClr val="020B0F"/>
+                </a:solidFill>
+                <a:latin typeface="Times New Roman"/>
+                <a:ea typeface="ＭＳ Ｐゴシック"/>
+                <a:cs typeface="Times New Roman"/>
+              </a:rPr>
+              <a:t> y </a:t>
+            </a:r>
+            <a:r>
+              <a:rPr lang="es-CO" sz="1100" err="1">
+                <a:solidFill>
+                  <a:srgbClr val="020B0F"/>
+                </a:solidFill>
+                <a:latin typeface="Times New Roman"/>
+                <a:ea typeface="ＭＳ Ｐゴシック"/>
+                <a:cs typeface="Times New Roman"/>
+              </a:rPr>
+              <a:t>XGBoost</a:t>
+            </a:r>
+            <a:r>
+              <a:rPr lang="es-CO" sz="1100">
+                <a:solidFill>
+                  <a:srgbClr val="020B0F"/>
+                </a:solidFill>
+                <a:latin typeface="Times New Roman"/>
+                <a:ea typeface="ＭＳ Ｐゴシック"/>
+                <a:cs typeface="Times New Roman"/>
+              </a:rPr>
+              <a:t> también ofrecen excelentes resultados en ciertos casos.</a:t>
+            </a:r>
+            <a:r>
+              <a:rPr lang="es-ES" sz="1100">
+                <a:solidFill>
+                  <a:srgbClr val="020B0F"/>
+                </a:solidFill>
+                <a:latin typeface="Times New Roman"/>
+                <a:ea typeface="ＭＳ Ｐゴシック"/>
+                <a:cs typeface="Times New Roman"/>
+              </a:rPr>
+              <a:t> </a:t>
+            </a:r>
+            <a:r>
+              <a:rPr lang="es-CO" sz="1100">
+                <a:solidFill>
+                  <a:srgbClr val="020B0F"/>
+                </a:solidFill>
+                <a:latin typeface="Times New Roman"/>
+                <a:ea typeface="ＭＳ Ｐゴシック"/>
+                <a:cs typeface="Times New Roman"/>
+              </a:rPr>
+              <a:t>La arquitectura construida es </a:t>
+            </a:r>
+            <a:r>
+              <a:rPr lang="es-CO" sz="1100" b="1">
+                <a:solidFill>
+                  <a:srgbClr val="020B0F"/>
+                </a:solidFill>
+                <a:latin typeface="Times New Roman"/>
+                <a:ea typeface="ＭＳ Ｐゴシック"/>
+                <a:cs typeface="Times New Roman"/>
+              </a:rPr>
+              <a:t>escalable y transferible</a:t>
+            </a:r>
+            <a:r>
+              <a:rPr lang="es-CO" sz="1100">
+                <a:solidFill>
+                  <a:srgbClr val="020B0F"/>
+                </a:solidFill>
+                <a:latin typeface="Times New Roman"/>
+                <a:ea typeface="ＭＳ Ｐゴシック"/>
+                <a:cs typeface="Times New Roman"/>
+              </a:rPr>
+              <a:t> a otras categorías de producto o entornos de demanda.</a:t>
+            </a:r>
+            <a:r>
+              <a:rPr lang="es-ES" sz="1100">
+                <a:solidFill>
+                  <a:srgbClr val="020B0F"/>
+                </a:solidFill>
+                <a:latin typeface="Arial"/>
+                <a:ea typeface="ＭＳ Ｐゴシック"/>
+              </a:rPr>
+              <a:t> </a:t>
+            </a:r>
+            <a:endParaRPr lang="es-ES">
+              <a:solidFill>
+                <a:srgbClr val="020B0F"/>
+              </a:solidFill>
+            </a:endParaRPr>
+          </a:p>
+        </p:txBody>
+      </p:sp>
+      <p:sp>
+        <p:nvSpPr>
+          <p:cNvPr id="51" name="CuadroTexto 50">
+            <a:extLst>
+              <a:ext uri="{FF2B5EF4-FFF2-40B4-BE49-F238E27FC236}">
+                <a16:creationId xmlns:a16="http://schemas.microsoft.com/office/drawing/2014/main" id="{33D31C5A-83FB-439E-66CA-8AE8ABDF83CF}"/>
+              </a:ext>
+            </a:extLst>
+          </p:cNvPr>
+          <p:cNvSpPr txBox="1"/>
+          <p:nvPr/>
+        </p:nvSpPr>
+        <p:spPr>
+          <a:xfrm>
+            <a:off x="7296230" y="3429665"/>
+            <a:ext cx="2743200" cy="1277273"/>
+          </a:xfrm>
+          <a:prstGeom prst="rect">
+            <a:avLst/>
+          </a:prstGeom>
+          <a:noFill/>
+        </p:spPr>
+        <p:txBody>
+          <a:bodyPr rot="0" spcFirstLastPara="0" vertOverflow="overflow" horzOverflow="overflow" vert="horz" wrap="square" lIns="91440" tIns="45720" rIns="91440" bIns="45720" numCol="1" spcCol="0" rtlCol="0" fromWordArt="0" anchor="t" anchorCtr="0" forceAA="0" compatLnSpc="1">
+            <a:prstTxWarp prst="textNoShape">
+              <a:avLst/>
+            </a:prstTxWarp>
+            <a:spAutoFit/>
+          </a:bodyPr>
+          <a:lstStyle/>
+          <a:p>
+            <a:pPr algn="just"/>
+            <a:r>
+              <a:rPr lang="es-CO" sz="1100">
+                <a:solidFill>
+                  <a:srgbClr val="000000"/>
+                </a:solidFill>
+                <a:latin typeface="Times New Roman"/>
+                <a:ea typeface="ＭＳ Ｐゴシック"/>
+                <a:cs typeface="Times New Roman"/>
+              </a:rPr>
+              <a:t>Se recomienda </a:t>
+            </a:r>
+            <a:r>
+              <a:rPr lang="es-CO" sz="1100" b="1">
+                <a:solidFill>
+                  <a:srgbClr val="000000"/>
+                </a:solidFill>
+                <a:latin typeface="Times New Roman"/>
+                <a:ea typeface="ＭＳ Ｐゴシック"/>
+                <a:cs typeface="Times New Roman"/>
+              </a:rPr>
+              <a:t>integrar este pipeline al proceso semanal de pronóstico de la empresa</a:t>
+            </a:r>
+            <a:r>
+              <a:rPr lang="es-CO" sz="1100">
+                <a:solidFill>
+                  <a:srgbClr val="000000"/>
+                </a:solidFill>
+                <a:latin typeface="Times New Roman"/>
+                <a:ea typeface="ＭＳ Ｐゴシック"/>
+                <a:cs typeface="Times New Roman"/>
+              </a:rPr>
+              <a:t>, y en fases futuras evaluar el uso de modelos más complejos como </a:t>
+            </a:r>
+            <a:r>
+              <a:rPr lang="es-CO" sz="1100" err="1">
+                <a:solidFill>
+                  <a:srgbClr val="000000"/>
+                </a:solidFill>
+                <a:latin typeface="Times New Roman"/>
+                <a:ea typeface="ＭＳ Ｐゴシック"/>
+                <a:cs typeface="Times New Roman"/>
+              </a:rPr>
+              <a:t>Prophet</a:t>
+            </a:r>
+            <a:r>
+              <a:rPr lang="es-CO" sz="1100">
+                <a:solidFill>
+                  <a:srgbClr val="000000"/>
+                </a:solidFill>
+                <a:latin typeface="Times New Roman"/>
+                <a:ea typeface="ＭＳ Ｐゴシック"/>
+                <a:cs typeface="Times New Roman"/>
+              </a:rPr>
+              <a:t>, </a:t>
+            </a:r>
+            <a:r>
+              <a:rPr lang="es-CO" sz="1100" err="1">
+                <a:solidFill>
+                  <a:srgbClr val="000000"/>
+                </a:solidFill>
+                <a:latin typeface="Times New Roman"/>
+                <a:ea typeface="ＭＳ Ｐゴシック"/>
+                <a:cs typeface="Times New Roman"/>
+              </a:rPr>
+              <a:t>Croston</a:t>
+            </a:r>
+            <a:r>
+              <a:rPr lang="es-CO" sz="1100">
+                <a:solidFill>
+                  <a:srgbClr val="000000"/>
+                </a:solidFill>
+                <a:latin typeface="Times New Roman"/>
+                <a:ea typeface="ＭＳ Ｐゴシック"/>
+                <a:cs typeface="Times New Roman"/>
+              </a:rPr>
+              <a:t> y redes LSTM para capturar demanda errática o altamente dependiente de factores externos.</a:t>
+            </a:r>
+          </a:p>
+        </p:txBody>
+      </p:sp>
+    </p:spTree>
+    <p:extLst>
+      <p:ext uri="{BB962C8B-B14F-4D97-AF65-F5344CB8AC3E}">
+        <p14:creationId xmlns:p14="http://schemas.microsoft.com/office/powerpoint/2010/main" val="425621508"/>
       </p:ext>
     </p:extLst>
   </p:cSld>
@@ -18274,7 +19402,7 @@
           <a:p>
             <a:fld id="{006B194E-E808-0B40-A05B-8A442F73F8B1}" type="datetime1">
               <a:rPr lang="es-CO" smtClean="0"/>
-              <a:t>24/06/2025</a:t>
+              <a:t>25/06/2025</a:t>
             </a:fld>
             <a:endParaRPr lang="es-CO"/>
           </a:p>
@@ -18336,7 +19464,7 @@
           <a:p>
             <a:pPr algn="ctr"/>
             <a:r>
-              <a:rPr lang="es-CO" b="1" dirty="0">
+              <a:rPr lang="es-CO" b="1">
                 <a:cs typeface="Arial"/>
               </a:rPr>
               <a:t>CONTEXTO</a:t>
@@ -18440,14 +19568,14 @@
               <a:p>
                 <a:pPr algn="just"/>
                 <a:r>
-                  <a:rPr lang="es-MX" sz="1400" dirty="0">
+                  <a:rPr lang="es-MX" sz="1400">
                     <a:solidFill>
                       <a:schemeClr val="tx1"/>
                     </a:solidFill>
                   </a:rPr>
                   <a:t>La empresa objeto de estudio es una compañía B2B que comercializa productos lácteos, entre ellos una categoría crítica de productos líquidos con vida útil corta. Debido a la naturaleza perecedera de estos productos, la sincronización entre la producción, el despacho y la demanda real es esencial para evitar pérdidas por vencimiento o por falta de disponibilidad en los puntos de distribución</a:t>
                 </a:r>
-                <a:endParaRPr lang="es-CO" sz="1400" dirty="0">
+                <a:endParaRPr lang="es-CO" sz="1400">
                   <a:solidFill>
                     <a:schemeClr val="tx1"/>
                   </a:solidFill>
@@ -18544,7 +19672,7 @@
             <a:p>
               <a:pPr algn="ctr"/>
               <a:r>
-                <a:rPr lang="es-CO" sz="1400" b="1" dirty="0">
+                <a:rPr lang="es-CO" sz="1400" b="1">
                   <a:solidFill>
                     <a:schemeClr val="bg1"/>
                   </a:solidFill>
@@ -18633,7 +19761,7 @@
             <a:p>
               <a:pPr algn="just"/>
               <a:r>
-                <a:rPr lang="es-MX" sz="1400" dirty="0">
+                <a:rPr lang="es-MX" sz="1400">
                   <a:solidFill>
                     <a:schemeClr val="tx1"/>
                   </a:solidFill>
@@ -18642,7 +19770,7 @@
               </a:r>
             </a:p>
             <a:p>
-              <a:endParaRPr lang="es-MX" sz="1400" dirty="0">
+              <a:endParaRPr lang="es-MX" sz="1400">
                 <a:solidFill>
                   <a:schemeClr val="tx1"/>
                 </a:solidFill>
@@ -18654,7 +19782,7 @@
                 <a:buChar char="•"/>
               </a:pPr>
               <a:r>
-                <a:rPr lang="es-MX" sz="1400" dirty="0">
+                <a:rPr lang="es-MX" sz="1400">
                   <a:solidFill>
                     <a:schemeClr val="tx1"/>
                   </a:solidFill>
@@ -18668,7 +19796,7 @@
                 <a:buChar char="•"/>
               </a:pPr>
               <a:r>
-                <a:rPr lang="es-MX" sz="1400" dirty="0">
+                <a:rPr lang="es-MX" sz="1400">
                   <a:solidFill>
                     <a:schemeClr val="tx1"/>
                   </a:solidFill>
@@ -18682,7 +19810,7 @@
                 <a:buChar char="•"/>
               </a:pPr>
               <a:r>
-                <a:rPr lang="es-MX" sz="1400" dirty="0">
+                <a:rPr lang="es-MX" sz="1400">
                   <a:solidFill>
                     <a:schemeClr val="tx1"/>
                   </a:solidFill>
@@ -18695,7 +19823,7 @@
                 <a:buFont typeface="Arial" panose="020B0604020202020204" pitchFamily="34" charset="0"/>
                 <a:buChar char="•"/>
               </a:pPr>
-              <a:endParaRPr lang="es-CO" sz="1200" dirty="0">
+              <a:endParaRPr lang="es-CO" sz="1200">
                 <a:solidFill>
                   <a:schemeClr val="tx1"/>
                 </a:solidFill>
@@ -18791,7 +19919,7 @@
             <a:p>
               <a:pPr algn="ctr"/>
               <a:r>
-                <a:rPr lang="es-CO" sz="1400" b="1" dirty="0"/>
+                <a:rPr lang="es-CO" sz="1400" b="1"/>
                 <a:t>Problema Principal</a:t>
               </a:r>
             </a:p>
@@ -18877,7 +20005,7 @@
                 <a:buChar char="•"/>
               </a:pPr>
               <a:r>
-                <a:rPr lang="es-MX" sz="1400" dirty="0">
+                <a:rPr lang="es-MX" sz="1400">
                   <a:solidFill>
                     <a:schemeClr val="tx1"/>
                   </a:solidFill>
@@ -18885,7 +20013,7 @@
                 <a:t>Desarrollar un modelo predictivo de demanda que permita superar el 65% de asertividad semanal en la categoría de productos líquidos, utilizando técnicas de Machine </a:t>
               </a:r>
               <a:r>
-                <a:rPr lang="es-MX" sz="1400" dirty="0" err="1">
+                <a:rPr lang="es-MX" sz="1400" err="1">
                   <a:solidFill>
                     <a:schemeClr val="tx1"/>
                   </a:solidFill>
@@ -18893,14 +20021,14 @@
                 <a:t>Learning</a:t>
               </a:r>
               <a:r>
-                <a:rPr lang="es-MX" sz="1400" dirty="0">
+                <a:rPr lang="es-MX" sz="1400">
                   <a:solidFill>
                     <a:schemeClr val="tx1"/>
                   </a:solidFill>
                 </a:rPr>
                 <a:t> y series de tiempo en un horizonte de 6 meses.</a:t>
               </a:r>
-              <a:endParaRPr lang="es-CO" sz="1400" dirty="0">
+              <a:endParaRPr lang="es-CO" sz="1400">
                 <a:solidFill>
                   <a:schemeClr val="tx1"/>
                 </a:solidFill>
@@ -18996,7 +20124,7 @@
             <a:p>
               <a:pPr algn="ctr"/>
               <a:r>
-                <a:rPr lang="es-CO" sz="1400" b="1" dirty="0">
+                <a:rPr lang="es-CO" sz="1400" b="1">
                   <a:solidFill>
                     <a:schemeClr val="bg1"/>
                   </a:solidFill>
@@ -19005,7 +20133,7 @@
                 </a:rPr>
                 <a:t>Objetivo General</a:t>
               </a:r>
-              <a:endParaRPr lang="es-CO" sz="1800" b="1" dirty="0">
+              <a:endParaRPr lang="es-CO" sz="1800" b="1">
                 <a:solidFill>
                   <a:schemeClr val="bg1"/>
                 </a:solidFill>
@@ -19087,73 +20215,109 @@
             </a:fontRef>
           </p:style>
           <p:txBody>
-            <a:bodyPr rtlCol="0" anchor="ctr"/>
+            <a:bodyPr lIns="91440" tIns="45720" rIns="91440" bIns="45720" rtlCol="0" anchor="ctr"/>
             <a:lstStyle/>
             <a:p>
-              <a:pPr marL="179388" indent="-179388">
+              <a:pPr marL="179070" indent="-179070">
+                <a:buFont typeface="Arial" panose="020B0604020202020204" pitchFamily="34" charset="0"/>
+                <a:buChar char="•"/>
+              </a:pPr>
+              <a:endParaRPr lang="es-MX" sz="1400">
+                <a:solidFill>
+                  <a:schemeClr val="tx1"/>
+                </a:solidFill>
+              </a:endParaRPr>
+            </a:p>
+            <a:p>
+              <a:pPr marL="179070" indent="-179070">
                 <a:buFont typeface="Arial" panose="020B0604020202020204" pitchFamily="34" charset="0"/>
                 <a:buChar char="•"/>
               </a:pPr>
               <a:r>
-                <a:rPr lang="es-MX" sz="1400" dirty="0">
+                <a:rPr lang="es-MX" sz="1400">
                   <a:solidFill>
                     <a:schemeClr val="tx1"/>
                   </a:solidFill>
                 </a:rPr>
                 <a:t>Analizar patrones históricos de pedidos y envíos.</a:t>
               </a:r>
+              <a:endParaRPr lang="en-US">
+                <a:solidFill>
+                  <a:schemeClr val="tx1"/>
+                </a:solidFill>
+                <a:cs typeface="Arial"/>
+              </a:endParaRPr>
             </a:p>
             <a:p>
-              <a:pPr marL="179388" indent="-179388" algn="just">
+              <a:pPr marL="179070" indent="-179070" algn="just">
                 <a:buFont typeface="Arial" panose="020B0604020202020204" pitchFamily="34" charset="0"/>
                 <a:buChar char="•"/>
               </a:pPr>
               <a:r>
-                <a:rPr lang="es-MX" sz="1400" dirty="0">
+                <a:rPr lang="es-MX" sz="1400">
                   <a:solidFill>
                     <a:schemeClr val="tx1"/>
                   </a:solidFill>
                 </a:rPr>
-                <a:t>Incorporar variables externas que impactan la demanda (festivos, quincenas, temporada escolar, etc.).</a:t>
+                <a:t>Incorporar variables externas que impactan la demanda (festivos, quincenas, etc.).</a:t>
               </a:r>
+              <a:endParaRPr lang="es-MX" sz="1400">
+                <a:solidFill>
+                  <a:schemeClr val="tx1"/>
+                </a:solidFill>
+                <a:cs typeface="Arial"/>
+              </a:endParaRPr>
             </a:p>
             <a:p>
-              <a:pPr marL="179388" indent="-179388">
+              <a:pPr marL="179070" indent="-179070">
                 <a:buFont typeface="Arial" panose="020B0604020202020204" pitchFamily="34" charset="0"/>
                 <a:buChar char="•"/>
               </a:pPr>
               <a:r>
-                <a:rPr lang="es-MX" sz="1400" dirty="0">
+                <a:rPr lang="es-MX" sz="1400">
                   <a:solidFill>
                     <a:schemeClr val="tx1"/>
                   </a:solidFill>
                 </a:rPr>
                 <a:t>Evaluar modelos de predicción tradicionales y de aprendizaje automático para 26 SKU que componen todo el portafolio de la categoría líquidos. </a:t>
               </a:r>
+              <a:endParaRPr lang="es-MX" sz="1400">
+                <a:solidFill>
+                  <a:schemeClr val="tx1"/>
+                </a:solidFill>
+                <a:cs typeface="Arial"/>
+              </a:endParaRPr>
             </a:p>
             <a:p>
-              <a:pPr marL="179388" indent="-179388">
+              <a:pPr marL="179070" indent="-179070">
                 <a:buFont typeface="Arial" panose="020B0604020202020204" pitchFamily="34" charset="0"/>
                 <a:buChar char="•"/>
               </a:pPr>
               <a:r>
-                <a:rPr lang="es-MX" sz="1400" dirty="0">
+                <a:rPr lang="es-MX" sz="1400">
                   <a:solidFill>
                     <a:schemeClr val="tx1"/>
                   </a:solidFill>
                 </a:rPr>
                 <a:t>Automatizar la generación de pronósticos semanales.</a:t>
               </a:r>
+              <a:endParaRPr lang="es-MX" sz="1400">
+                <a:solidFill>
+                  <a:schemeClr val="tx1"/>
+                </a:solidFill>
+                <a:cs typeface="Arial"/>
+              </a:endParaRPr>
             </a:p>
             <a:p>
-              <a:pPr marL="179388" indent="-179388">
+              <a:pPr marL="179070" indent="-179070">
                 <a:buFont typeface="Arial" panose="020B0604020202020204" pitchFamily="34" charset="0"/>
                 <a:buChar char="•"/>
               </a:pPr>
-              <a:endParaRPr lang="es-CO" sz="1400" dirty="0">
+              <a:endParaRPr lang="es-CO" sz="1400">
                 <a:solidFill>
                   <a:schemeClr val="tx1"/>
                 </a:solidFill>
+                <a:cs typeface="Arial" panose="020B0604020202020204"/>
               </a:endParaRPr>
             </a:p>
           </p:txBody>
@@ -19246,14 +20410,14 @@
             <a:p>
               <a:pPr algn="ctr"/>
               <a:r>
-                <a:rPr lang="es-CO" sz="1400" b="1" dirty="0">
+                <a:rPr lang="es-CO" sz="1400" b="1">
                   <a:solidFill>
                     <a:schemeClr val="bg1"/>
                   </a:solidFill>
                 </a:rPr>
                 <a:t>Objetivos Específicos</a:t>
               </a:r>
-              <a:endParaRPr lang="es-CO" sz="1800" b="1" dirty="0">
+              <a:endParaRPr lang="es-CO" sz="1800" b="1">
                 <a:solidFill>
                   <a:schemeClr val="bg1"/>
                 </a:solidFill>
@@ -19341,7 +20505,7 @@
                 <a:buChar char="•"/>
               </a:pPr>
               <a:r>
-                <a:rPr lang="es-MX" sz="1400" dirty="0">
+                <a:rPr lang="es-MX" sz="1400">
                   <a:solidFill>
                     <a:schemeClr val="tx1"/>
                   </a:solidFill>
@@ -19349,7 +20513,7 @@
                 <a:t>¿Es posible superar el 65% de asertividad semanal del </a:t>
               </a:r>
               <a:r>
-                <a:rPr lang="es-MX" sz="1400" dirty="0" err="1">
+                <a:rPr lang="es-MX" sz="1400" err="1">
                   <a:solidFill>
                     <a:schemeClr val="tx1"/>
                   </a:solidFill>
@@ -19357,7 +20521,7 @@
                 <a:t>forecast</a:t>
               </a:r>
               <a:r>
-                <a:rPr lang="es-MX" sz="1400" dirty="0">
+                <a:rPr lang="es-MX" sz="1400">
                   <a:solidFill>
                     <a:schemeClr val="tx1"/>
                   </a:solidFill>
@@ -19365,7 +20529,7 @@
                 <a:t> en la categoría de líquidos en 6 meses aplicando modelos de series de tiempo y/o machine </a:t>
               </a:r>
               <a:r>
-                <a:rPr lang="es-MX" sz="1400" dirty="0" err="1">
+                <a:rPr lang="es-MX" sz="1400" err="1">
                   <a:solidFill>
                     <a:schemeClr val="tx1"/>
                   </a:solidFill>
@@ -19373,14 +20537,14 @@
                 <a:t>learning</a:t>
               </a:r>
               <a:r>
-                <a:rPr lang="es-MX" sz="1400" dirty="0">
+                <a:rPr lang="es-MX" sz="1400">
                   <a:solidFill>
                     <a:schemeClr val="tx1"/>
                   </a:solidFill>
                 </a:rPr>
                 <a:t> para modelar patrones de compra del cliente?</a:t>
               </a:r>
-              <a:endParaRPr lang="es-CO" sz="1400" dirty="0">
+              <a:endParaRPr lang="es-CO" sz="1400">
                 <a:solidFill>
                   <a:schemeClr val="tx1"/>
                 </a:solidFill>
@@ -19476,7 +20640,7 @@
             <a:p>
               <a:pPr algn="ctr"/>
               <a:r>
-                <a:rPr lang="es-CO" sz="1400" b="1" dirty="0">
+                <a:rPr lang="es-CO" sz="1400" b="1">
                   <a:solidFill>
                     <a:schemeClr val="bg1"/>
                   </a:solidFill>
@@ -19540,12 +20704,12 @@
           <a:p>
             <a:pPr algn="ctr"/>
             <a:r>
-              <a:rPr lang="es-419" sz="2400" b="1" dirty="0">
+              <a:rPr lang="es-419" sz="2400" b="1">
                 <a:cs typeface="Arial"/>
               </a:rPr>
               <a:t>ÁRBOL DEL PROBLEMA</a:t>
             </a:r>
-            <a:endParaRPr lang="es-CO" sz="2400" b="1" dirty="0">
+            <a:endParaRPr lang="es-CO" sz="2400" b="1">
               <a:cs typeface="Arial"/>
             </a:endParaRPr>
           </a:p>
@@ -19574,7 +20738,7 @@
           <a:p>
             <a:fld id="{A466D45A-6C87-F94D-B105-2DA5D810D35A}" type="datetime1">
               <a:rPr lang="es-CO" smtClean="0"/>
-              <a:t>24/06/2025</a:t>
+              <a:t>25/06/2025</a:t>
             </a:fld>
             <a:endParaRPr lang="es-CO"/>
           </a:p>
@@ -19608,7 +20772,7 @@
               </a:rPr>
               <a:t>3 </a:t>
             </a:r>
-            <a:endParaRPr lang="es-CO" dirty="0">
+            <a:endParaRPr lang="es-CO">
               <a:latin typeface="Arial"/>
               <a:ea typeface="ＭＳ Ｐゴシック"/>
             </a:endParaRPr>
@@ -19830,37 +20994,9 @@
           <a:p>
             <a:fld id="{160BC514-765A-2C41-8155-E95E2B676F6F}" type="datetime1">
               <a:rPr lang="es-CO" smtClean="0"/>
-              <a:t>24/06/2025</a:t>
+              <a:t>25/06/2025</a:t>
             </a:fld>
             <a:endParaRPr lang="es-CO"/>
-          </a:p>
-        </p:txBody>
-      </p:sp>
-      <p:sp>
-        <p:nvSpPr>
-          <p:cNvPr id="3" name="Marcador de pie de página 2">
-            <a:extLst>
-              <a:ext uri="{FF2B5EF4-FFF2-40B4-BE49-F238E27FC236}">
-                <a16:creationId xmlns:a16="http://schemas.microsoft.com/office/drawing/2014/main" id="{A78DFE22-71AE-C31F-6FCA-881EC4BBCA0E}"/>
-              </a:ext>
-            </a:extLst>
-          </p:cNvPr>
-          <p:cNvSpPr>
-            <a:spLocks noGrp="1"/>
-          </p:cNvSpPr>
-          <p:nvPr>
-            <p:ph type="ftr" sz="quarter" idx="11"/>
-          </p:nvPr>
-        </p:nvSpPr>
-        <p:spPr/>
-        <p:txBody>
-          <a:bodyPr/>
-          <a:lstStyle/>
-          <a:p>
-            <a:r>
-              <a:rPr lang="es-CO"/>
-              <a:t>5</a:t>
-            </a:r>
           </a:p>
         </p:txBody>
       </p:sp>
@@ -19892,10 +21028,10 @@
           <a:p>
             <a:pPr algn="ctr"/>
             <a:r>
-              <a:rPr lang="es-CO" b="1" dirty="0"/>
+              <a:rPr lang="es-CO" b="1"/>
               <a:t>MÉTODOLOGIA</a:t>
             </a:r>
-            <a:endParaRPr lang="es-CO" dirty="0"/>
+            <a:endParaRPr lang="es-CO"/>
           </a:p>
         </p:txBody>
       </p:sp>
@@ -19986,37 +21122,9 @@
           <a:p>
             <a:fld id="{160BC514-765A-2C41-8155-E95E2B676F6F}" type="datetime1">
               <a:rPr lang="es-CO" smtClean="0"/>
-              <a:t>24/06/2025</a:t>
+              <a:t>25/06/2025</a:t>
             </a:fld>
             <a:endParaRPr lang="es-CO"/>
-          </a:p>
-        </p:txBody>
-      </p:sp>
-      <p:sp>
-        <p:nvSpPr>
-          <p:cNvPr id="3" name="Marcador de pie de página 2">
-            <a:extLst>
-              <a:ext uri="{FF2B5EF4-FFF2-40B4-BE49-F238E27FC236}">
-                <a16:creationId xmlns:a16="http://schemas.microsoft.com/office/drawing/2014/main" id="{8BAD72BC-0F62-1E6C-E9DA-0D5B42A9DBF4}"/>
-              </a:ext>
-            </a:extLst>
-          </p:cNvPr>
-          <p:cNvSpPr>
-            <a:spLocks noGrp="1"/>
-          </p:cNvSpPr>
-          <p:nvPr>
-            <p:ph type="ftr" sz="quarter" idx="11"/>
-          </p:nvPr>
-        </p:nvSpPr>
-        <p:spPr/>
-        <p:txBody>
-          <a:bodyPr/>
-          <a:lstStyle/>
-          <a:p>
-            <a:r>
-              <a:rPr lang="es-CO"/>
-              <a:t>5</a:t>
-            </a:r>
           </a:p>
         </p:txBody>
       </p:sp>
@@ -20048,10 +21156,10 @@
           <a:p>
             <a:pPr algn="ctr"/>
             <a:r>
-              <a:rPr lang="es-CO" b="1" dirty="0"/>
+              <a:rPr lang="es-CO" b="1"/>
               <a:t>MODELOS Y PROTOCOLOS USADOS</a:t>
             </a:r>
-            <a:endParaRPr lang="es-CO" dirty="0"/>
+            <a:endParaRPr lang="es-CO"/>
           </a:p>
         </p:txBody>
       </p:sp>
@@ -20103,6 +21211,136 @@
   <p:cSld>
     <p:spTree>
       <p:nvGrpSpPr>
+        <p:cNvPr id="1" name="">
+          <a:extLst>
+            <a:ext uri="{FF2B5EF4-FFF2-40B4-BE49-F238E27FC236}">
+              <a16:creationId xmlns:a16="http://schemas.microsoft.com/office/drawing/2014/main" id="{4D051420-27CD-A8EB-A3AE-D84561FE6DA6}"/>
+            </a:ext>
+          </a:extLst>
+        </p:cNvPr>
+        <p:cNvGrpSpPr/>
+        <p:nvPr/>
+      </p:nvGrpSpPr>
+      <p:grpSpPr>
+        <a:xfrm>
+          <a:off x="0" y="0"/>
+          <a:ext cx="0" cy="0"/>
+          <a:chOff x="0" y="0"/>
+          <a:chExt cx="0" cy="0"/>
+        </a:xfrm>
+      </p:grpSpPr>
+      <p:sp>
+        <p:nvSpPr>
+          <p:cNvPr id="2" name="Marcador de fecha 1">
+            <a:extLst>
+              <a:ext uri="{FF2B5EF4-FFF2-40B4-BE49-F238E27FC236}">
+                <a16:creationId xmlns:a16="http://schemas.microsoft.com/office/drawing/2014/main" id="{3FD245C4-BD69-8DBB-E320-F48A6292F44F}"/>
+              </a:ext>
+            </a:extLst>
+          </p:cNvPr>
+          <p:cNvSpPr>
+            <a:spLocks noGrp="1"/>
+          </p:cNvSpPr>
+          <p:nvPr>
+            <p:ph type="dt" sz="half" idx="10"/>
+          </p:nvPr>
+        </p:nvSpPr>
+        <p:spPr/>
+        <p:txBody>
+          <a:bodyPr/>
+          <a:lstStyle/>
+          <a:p>
+            <a:fld id="{160BC514-765A-2C41-8155-E95E2B676F6F}" type="datetime1">
+              <a:rPr lang="es-CO" smtClean="0"/>
+              <a:t>25/06/2025</a:t>
+            </a:fld>
+            <a:endParaRPr lang="es-CO"/>
+          </a:p>
+        </p:txBody>
+      </p:sp>
+      <p:sp>
+        <p:nvSpPr>
+          <p:cNvPr id="10" name="Título 9">
+            <a:extLst>
+              <a:ext uri="{FF2B5EF4-FFF2-40B4-BE49-F238E27FC236}">
+                <a16:creationId xmlns:a16="http://schemas.microsoft.com/office/drawing/2014/main" id="{4C76B9E9-EF15-B3F9-852C-EA0CA886D761}"/>
+              </a:ext>
+            </a:extLst>
+          </p:cNvPr>
+          <p:cNvSpPr>
+            <a:spLocks noGrp="1"/>
+          </p:cNvSpPr>
+          <p:nvPr>
+            <p:ph type="title"/>
+          </p:nvPr>
+        </p:nvSpPr>
+        <p:spPr>
+          <a:xfrm>
+            <a:off x="260048" y="348759"/>
+            <a:ext cx="11371383" cy="647748"/>
+          </a:xfrm>
+        </p:spPr>
+        <p:txBody>
+          <a:bodyPr anchor="ctr"/>
+          <a:lstStyle/>
+          <a:p>
+            <a:pPr algn="ctr"/>
+            <a:r>
+              <a:rPr lang="es-CO" b="1"/>
+              <a:t>MODELOS Y PROTOCOLOS USADOS</a:t>
+            </a:r>
+            <a:endParaRPr lang="es-CO"/>
+          </a:p>
+        </p:txBody>
+      </p:sp>
+      <p:pic>
+        <p:nvPicPr>
+          <p:cNvPr id="4" name="Picture 3">
+            <a:extLst>
+              <a:ext uri="{FF2B5EF4-FFF2-40B4-BE49-F238E27FC236}">
+                <a16:creationId xmlns:a16="http://schemas.microsoft.com/office/drawing/2014/main" id="{2811DF57-AC01-C239-9A80-479F7ADA89B1}"/>
+              </a:ext>
+            </a:extLst>
+          </p:cNvPr>
+          <p:cNvPicPr>
+            <a:picLocks noChangeAspect="1"/>
+          </p:cNvPicPr>
+          <p:nvPr/>
+        </p:nvPicPr>
+        <p:blipFill>
+          <a:blip r:embed="rId2"/>
+          <a:stretch>
+            <a:fillRect/>
+          </a:stretch>
+        </p:blipFill>
+        <p:spPr>
+          <a:xfrm>
+            <a:off x="105979" y="841321"/>
+            <a:ext cx="11971220" cy="5606871"/>
+          </a:xfrm>
+          <a:prstGeom prst="rect">
+            <a:avLst/>
+          </a:prstGeom>
+        </p:spPr>
+      </p:pic>
+    </p:spTree>
+    <p:extLst>
+      <p:ext uri="{BB962C8B-B14F-4D97-AF65-F5344CB8AC3E}">
+        <p14:creationId xmlns:p14="http://schemas.microsoft.com/office/powerpoint/2010/main" val="3420825718"/>
+      </p:ext>
+    </p:extLst>
+  </p:cSld>
+  <p:clrMapOvr>
+    <a:masterClrMapping/>
+  </p:clrMapOvr>
+</p:sld>
+</file>
+
+<file path=ppt/slides/slide7.xml><?xml version="1.0" encoding="utf-8"?>
+<p:sld xmlns:a="http://schemas.openxmlformats.org/drawingml/2006/main" xmlns:r="http://schemas.openxmlformats.org/officeDocument/2006/relationships" xmlns:p="http://schemas.openxmlformats.org/presentationml/2006/main" show="0">
+  <p:cSld>
+    <p:spTree>
+      <p:nvGrpSpPr>
         <p:cNvPr id="1" name=""/>
         <p:cNvGrpSpPr/>
         <p:nvPr/>
@@ -20138,33 +21376,8 @@
           <a:p>
             <a:fld id="{F73AFE69-43F1-4E09-B911-D59F5949CA9C}" type="datetime1">
               <a:rPr lang="es-CO" smtClean="0"/>
-              <a:t>24/06/2025</a:t>
+              <a:t>25/06/2025</a:t>
             </a:fld>
-            <a:endParaRPr lang="es-CO"/>
-          </a:p>
-        </p:txBody>
-      </p:sp>
-      <p:sp>
-        <p:nvSpPr>
-          <p:cNvPr id="3" name="Marcador de pie de página 2">
-            <a:extLst>
-              <a:ext uri="{FF2B5EF4-FFF2-40B4-BE49-F238E27FC236}">
-                <a16:creationId xmlns:a16="http://schemas.microsoft.com/office/drawing/2014/main" id="{FA6CC8B4-E0C5-82FF-F35D-3CBCA713544D}"/>
-              </a:ext>
-            </a:extLst>
-          </p:cNvPr>
-          <p:cNvSpPr>
-            <a:spLocks noGrp="1"/>
-          </p:cNvSpPr>
-          <p:nvPr>
-            <p:ph type="ftr" sz="quarter" idx="11"/>
-          </p:nvPr>
-        </p:nvSpPr>
-        <p:spPr/>
-        <p:txBody>
-          <a:bodyPr/>
-          <a:lstStyle/>
-          <a:p>
             <a:endParaRPr lang="es-CO"/>
           </a:p>
         </p:txBody>
@@ -20196,7 +21409,7 @@
           <a:lstStyle/>
           <a:p>
             <a:r>
-              <a:rPr lang="es-CO" dirty="0"/>
+              <a:rPr lang="es-CO"/>
               <a:t>RESULTADOS AGREADOS POR SEMANA SEGÚN PROTOCOLO</a:t>
             </a:r>
           </a:p>
@@ -20284,7 +21497,7 @@
                     <a:p>
                       <a:pPr algn="ctr" fontAlgn="b"/>
                       <a:r>
-                        <a:rPr lang="es-CO" sz="1800" b="1" u="none" strike="noStrike" dirty="0">
+                        <a:rPr lang="es-CO" sz="1800" b="1" u="none" strike="noStrike">
                           <a:solidFill>
                             <a:schemeClr val="bg1"/>
                           </a:solidFill>
@@ -20292,7 +21505,7 @@
                         </a:rPr>
                         <a:t>Producto</a:t>
                       </a:r>
-                      <a:endParaRPr lang="es-CO" sz="1800" b="1" i="0" u="none" strike="noStrike" dirty="0">
+                      <a:endParaRPr lang="es-CO" sz="1800" b="1" i="0" u="none" strike="noStrike">
                         <a:solidFill>
                           <a:schemeClr val="bg1"/>
                         </a:solidFill>
@@ -20350,7 +21563,7 @@
                     <a:p>
                       <a:pPr algn="ctr" fontAlgn="b"/>
                       <a:r>
-                        <a:rPr lang="es-CO" sz="1800" b="1" u="none" strike="noStrike" dirty="0" err="1">
+                        <a:rPr lang="es-CO" sz="1800" b="1" u="none" strike="noStrike" err="1">
                           <a:solidFill>
                             <a:schemeClr val="bg1"/>
                           </a:solidFill>
@@ -20359,7 +21572,7 @@
                         <a:t>Forecast</a:t>
                       </a:r>
                       <a:r>
-                        <a:rPr lang="es-CO" sz="1800" b="1" u="none" strike="noStrike" dirty="0">
+                        <a:rPr lang="es-CO" sz="1800" b="1" u="none" strike="noStrike">
                           <a:solidFill>
                             <a:schemeClr val="bg1"/>
                           </a:solidFill>
@@ -20368,7 +21581,7 @@
                         <a:t> (</a:t>
                       </a:r>
                       <a:r>
-                        <a:rPr lang="es-CO" sz="1800" b="1" u="none" strike="noStrike" dirty="0" err="1">
+                        <a:rPr lang="es-CO" sz="1800" b="1" u="none" strike="noStrike" err="1">
                           <a:solidFill>
                             <a:schemeClr val="bg1"/>
                           </a:solidFill>
@@ -20377,7 +21590,7 @@
                         <a:t>Und</a:t>
                       </a:r>
                       <a:r>
-                        <a:rPr lang="es-CO" sz="1800" b="1" u="none" strike="noStrike" dirty="0">
+                        <a:rPr lang="es-CO" sz="1800" b="1" u="none" strike="noStrike">
                           <a:solidFill>
                             <a:schemeClr val="bg1"/>
                           </a:solidFill>
@@ -20385,7 +21598,7 @@
                         </a:rPr>
                         <a:t>)</a:t>
                       </a:r>
-                      <a:endParaRPr lang="es-CO" sz="1800" b="1" i="0" u="none" strike="noStrike" dirty="0">
+                      <a:endParaRPr lang="es-CO" sz="1800" b="1" i="0" u="none" strike="noStrike">
                         <a:solidFill>
                           <a:schemeClr val="bg1"/>
                         </a:solidFill>
@@ -20443,7 +21656,7 @@
                     <a:p>
                       <a:pPr algn="ctr" fontAlgn="b"/>
                       <a:r>
-                        <a:rPr lang="es-CO" sz="1800" b="1" u="none" strike="noStrike" dirty="0">
+                        <a:rPr lang="es-CO" sz="1800" b="1" u="none" strike="noStrike">
                           <a:solidFill>
                             <a:schemeClr val="bg1"/>
                           </a:solidFill>
@@ -20452,7 +21665,7 @@
                         <a:t>Pedidos (</a:t>
                       </a:r>
                       <a:r>
-                        <a:rPr lang="es-CO" sz="1800" b="1" u="none" strike="noStrike" dirty="0" err="1">
+                        <a:rPr lang="es-CO" sz="1800" b="1" u="none" strike="noStrike" err="1">
                           <a:solidFill>
                             <a:schemeClr val="bg1"/>
                           </a:solidFill>
@@ -20461,7 +21674,7 @@
                         <a:t>Und</a:t>
                       </a:r>
                       <a:r>
-                        <a:rPr lang="es-CO" sz="1800" b="1" u="none" strike="noStrike" dirty="0">
+                        <a:rPr lang="es-CO" sz="1800" b="1" u="none" strike="noStrike">
                           <a:solidFill>
                             <a:schemeClr val="bg1"/>
                           </a:solidFill>
@@ -20469,7 +21682,7 @@
                         </a:rPr>
                         <a:t>)</a:t>
                       </a:r>
-                      <a:endParaRPr lang="es-CO" sz="1800" b="1" i="0" u="none" strike="noStrike" dirty="0">
+                      <a:endParaRPr lang="es-CO" sz="1800" b="1" i="0" u="none" strike="noStrike">
                         <a:solidFill>
                           <a:schemeClr val="bg1"/>
                         </a:solidFill>
@@ -20527,7 +21740,7 @@
                     <a:p>
                       <a:pPr algn="ctr" fontAlgn="b"/>
                       <a:r>
-                        <a:rPr lang="es-CO" sz="1800" b="1" u="none" strike="noStrike" dirty="0">
+                        <a:rPr lang="es-CO" sz="1800" b="1" u="none" strike="noStrike">
                           <a:solidFill>
                             <a:schemeClr val="bg1"/>
                           </a:solidFill>
@@ -20535,7 +21748,7 @@
                         </a:rPr>
                         <a:t>WMAPE</a:t>
                       </a:r>
-                      <a:endParaRPr lang="es-CO" sz="1800" b="1" i="0" u="none" strike="noStrike" dirty="0">
+                      <a:endParaRPr lang="es-CO" sz="1800" b="1" i="0" u="none" strike="noStrike">
                         <a:solidFill>
                           <a:schemeClr val="bg1"/>
                         </a:solidFill>
@@ -20593,7 +21806,7 @@
                     <a:p>
                       <a:pPr algn="ctr" fontAlgn="b"/>
                       <a:r>
-                        <a:rPr lang="es-CO" sz="1800" b="1" u="none" strike="noStrike" dirty="0">
+                        <a:rPr lang="es-CO" sz="1800" b="1" u="none" strike="noStrike">
                           <a:solidFill>
                             <a:schemeClr val="bg1"/>
                           </a:solidFill>
@@ -20601,7 +21814,7 @@
                         </a:rPr>
                         <a:t>MAPE  %</a:t>
                       </a:r>
-                      <a:endParaRPr lang="es-CO" sz="1800" b="1" i="0" u="none" strike="noStrike" dirty="0">
+                      <a:endParaRPr lang="es-CO" sz="1800" b="1" i="0" u="none" strike="noStrike">
                         <a:solidFill>
                           <a:schemeClr val="bg1"/>
                         </a:solidFill>
@@ -20659,7 +21872,7 @@
                     <a:p>
                       <a:pPr algn="ctr" fontAlgn="b"/>
                       <a:r>
-                        <a:rPr lang="es-CO" sz="1800" b="1" u="none" strike="noStrike" dirty="0" err="1">
+                        <a:rPr lang="es-CO" sz="1800" b="1" u="none" strike="noStrike" err="1">
                           <a:solidFill>
                             <a:schemeClr val="bg1"/>
                           </a:solidFill>
@@ -20668,7 +21881,7 @@
                         <a:t>Bias</a:t>
                       </a:r>
                       <a:r>
-                        <a:rPr lang="es-CO" sz="1800" b="1" u="none" strike="noStrike" dirty="0">
+                        <a:rPr lang="es-CO" sz="1800" b="1" u="none" strike="noStrike">
                           <a:solidFill>
                             <a:schemeClr val="bg1"/>
                           </a:solidFill>
@@ -20676,7 +21889,7 @@
                         </a:rPr>
                         <a:t> %</a:t>
                       </a:r>
-                      <a:endParaRPr lang="es-CO" sz="1800" b="1" i="0" u="none" strike="noStrike" dirty="0">
+                      <a:endParaRPr lang="es-CO" sz="1800" b="1" i="0" u="none" strike="noStrike">
                         <a:solidFill>
                           <a:schemeClr val="bg1"/>
                         </a:solidFill>
@@ -20801,12 +22014,12 @@
                     <a:p>
                       <a:pPr algn="ctr" fontAlgn="b"/>
                       <a:r>
-                        <a:rPr lang="es-CO" sz="1800" u="none" strike="noStrike" dirty="0">
+                        <a:rPr lang="es-CO" sz="1800" u="none" strike="noStrike">
                           <a:effectLst/>
                         </a:rPr>
                         <a:t>919,161</a:t>
                       </a:r>
-                      <a:endParaRPr lang="es-CO" sz="1800" b="1" i="0" u="none" strike="noStrike" dirty="0">
+                      <a:endParaRPr lang="es-CO" sz="1800" b="1" i="0" u="none" strike="noStrike">
                         <a:solidFill>
                           <a:srgbClr val="000000"/>
                         </a:solidFill>
@@ -21108,12 +22321,12 @@
                     <a:p>
                       <a:pPr algn="ctr" fontAlgn="b"/>
                       <a:r>
-                        <a:rPr lang="es-CO" sz="1800" u="none" strike="noStrike" dirty="0">
+                        <a:rPr lang="es-CO" sz="1800" u="none" strike="noStrike">
                           <a:effectLst/>
                         </a:rPr>
                         <a:t>Ventana Fija ST</a:t>
                       </a:r>
-                      <a:endParaRPr lang="es-CO" sz="1800" b="1" i="0" u="none" strike="noStrike" dirty="0">
+                      <a:endParaRPr lang="es-CO" sz="1800" b="1" i="0" u="none" strike="noStrike">
                         <a:solidFill>
                           <a:srgbClr val="000000"/>
                         </a:solidFill>
@@ -21475,12 +22688,12 @@
                     <a:p>
                       <a:pPr algn="ctr" fontAlgn="b"/>
                       <a:r>
-                        <a:rPr lang="es-CO" sz="1800" u="none" strike="noStrike" dirty="0">
+                        <a:rPr lang="es-CO" sz="1800" u="none" strike="noStrike">
                           <a:effectLst/>
                         </a:rPr>
                         <a:t>Ventana Recursiva ST</a:t>
                       </a:r>
-                      <a:endParaRPr lang="es-CO" sz="1800" b="1" i="0" u="none" strike="noStrike" dirty="0">
+                      <a:endParaRPr lang="es-CO" sz="1800" b="1" i="0" u="none" strike="noStrike">
                         <a:solidFill>
                           <a:srgbClr val="000000"/>
                         </a:solidFill>
@@ -21775,12 +22988,12 @@
                     <a:p>
                       <a:pPr algn="ctr" fontAlgn="b"/>
                       <a:r>
-                        <a:rPr lang="es-CO" sz="1800" u="none" strike="noStrike" dirty="0">
+                        <a:rPr lang="es-CO" sz="1800" u="none" strike="noStrike">
                           <a:effectLst/>
                         </a:rPr>
                         <a:t>24%</a:t>
                       </a:r>
-                      <a:endParaRPr lang="es-CO" sz="1800" b="1" i="0" u="none" strike="noStrike" dirty="0">
+                      <a:endParaRPr lang="es-CO" sz="1800" b="1" i="0" u="none" strike="noStrike">
                         <a:solidFill>
                           <a:srgbClr val="000000"/>
                         </a:solidFill>
@@ -21851,7 +23064,7 @@
 </p:sld>
 </file>
 
-<file path=ppt/slides/slide7.xml><?xml version="1.0" encoding="utf-8"?>
+<file path=ppt/slides/slide8.xml><?xml version="1.0" encoding="utf-8"?>
 <p:sld xmlns:a="http://schemas.openxmlformats.org/drawingml/2006/main" xmlns:r="http://schemas.openxmlformats.org/officeDocument/2006/relationships" xmlns:p="http://schemas.openxmlformats.org/presentationml/2006/main">
   <p:cSld>
     <p:spTree>
@@ -21920,7 +23133,7 @@
                   <a:spcPts val="600"/>
                 </a:spcAft>
               </a:pPr>
-              <a:t>24/06/2025</a:t>
+              <a:t>25/06/2025</a:t>
             </a:fld>
             <a:endParaRPr lang="es-CO" sz="1100"/>
           </a:p>
@@ -21985,7 +23198,7 @@
           <a:lstStyle/>
           <a:p>
             <a:r>
-              <a:rPr lang="es-CO" b="1" dirty="0"/>
+              <a:rPr lang="es-CO" b="1"/>
               <a:t>RESULTADOS AGREGADOS POR SEMANA POR SKU</a:t>
             </a:r>
           </a:p>
@@ -22034,12 +23247,18 @@
 </p:sld>
 </file>
 
-<file path=ppt/slides/slide8.xml><?xml version="1.0" encoding="utf-8"?>
+<file path=ppt/slides/slide9.xml><?xml version="1.0" encoding="utf-8"?>
 <p:sld xmlns:a="http://schemas.openxmlformats.org/drawingml/2006/main" xmlns:r="http://schemas.openxmlformats.org/officeDocument/2006/relationships" xmlns:p="http://schemas.openxmlformats.org/presentationml/2006/main">
   <p:cSld>
     <p:spTree>
       <p:nvGrpSpPr>
-        <p:cNvPr id="1" name=""/>
+        <p:cNvPr id="1" name="">
+          <a:extLst>
+            <a:ext uri="{FF2B5EF4-FFF2-40B4-BE49-F238E27FC236}">
+              <a16:creationId xmlns:a16="http://schemas.microsoft.com/office/drawing/2014/main" id="{B338640B-D927-D6A8-C7C3-B99A14347F8A}"/>
+            </a:ext>
+          </a:extLst>
+        </p:cNvPr>
         <p:cNvGrpSpPr/>
         <p:nvPr/>
       </p:nvGrpSpPr>
@@ -22056,7 +23275,7 @@
           <p:cNvPr id="2" name="Marcador de fecha 1">
             <a:extLst>
               <a:ext uri="{FF2B5EF4-FFF2-40B4-BE49-F238E27FC236}">
-                <a16:creationId xmlns:a16="http://schemas.microsoft.com/office/drawing/2014/main" id="{54D654DE-AD2E-B544-B68B-3EFFBA8ED140}"/>
+                <a16:creationId xmlns:a16="http://schemas.microsoft.com/office/drawing/2014/main" id="{1D74A144-6757-7075-27E4-BA0E9C28869C}"/>
               </a:ext>
             </a:extLst>
           </p:cNvPr>
@@ -22067,25 +23286,48 @@
             <p:ph type="dt" sz="half" idx="10"/>
           </p:nvPr>
         </p:nvSpPr>
-        <p:spPr/>
+        <p:spPr>
+          <a:xfrm>
+            <a:off x="304801" y="6484018"/>
+            <a:ext cx="1428466" cy="251105"/>
+          </a:xfrm>
+        </p:spPr>
         <p:txBody>
-          <a:bodyPr/>
+          <a:bodyPr anchor="ctr">
+            <a:normAutofit/>
+          </a:bodyPr>
           <a:lstStyle/>
           <a:p>
-            <a:fld id="{431D2F23-CF27-BF49-B983-496F0892B909}" type="datetime1">
-              <a:rPr lang="es-CO" smtClean="0"/>
-              <a:t>24/06/2025</a:t>
+            <a:pPr>
+              <a:lnSpc>
+                <a:spcPct val="90000"/>
+              </a:lnSpc>
+              <a:spcAft>
+                <a:spcPts val="600"/>
+              </a:spcAft>
+            </a:pPr>
+            <a:fld id="{F73AFE69-43F1-4E09-B911-D59F5949CA9C}" type="datetime1">
+              <a:rPr lang="es-CO" sz="1100" smtClean="0"/>
+              <a:pPr>
+                <a:lnSpc>
+                  <a:spcPct val="90000"/>
+                </a:lnSpc>
+                <a:spcAft>
+                  <a:spcPts val="600"/>
+                </a:spcAft>
+              </a:pPr>
+              <a:t>25/06/2025</a:t>
             </a:fld>
-            <a:endParaRPr lang="es-CO"/>
+            <a:endParaRPr lang="es-CO" sz="1100"/>
           </a:p>
         </p:txBody>
       </p:sp>
       <p:sp>
         <p:nvSpPr>
-          <p:cNvPr id="3" name="Marcador de pie de página 2">
+          <p:cNvPr id="5" name="Título 4">
             <a:extLst>
               <a:ext uri="{FF2B5EF4-FFF2-40B4-BE49-F238E27FC236}">
-                <a16:creationId xmlns:a16="http://schemas.microsoft.com/office/drawing/2014/main" id="{E8E4EC52-BD7A-1B41-8954-196AB9BD02F8}"/>
+                <a16:creationId xmlns:a16="http://schemas.microsoft.com/office/drawing/2014/main" id="{69D6BE99-BB5D-6A2D-2EEF-83B81B659E98}"/>
               </a:ext>
             </a:extLst>
           </p:cNvPr>
@@ -22093,143 +23335,65 @@
             <a:spLocks noGrp="1"/>
           </p:cNvSpPr>
           <p:nvPr>
-            <p:ph type="ftr" sz="quarter" idx="11"/>
+            <p:ph type="title"/>
           </p:nvPr>
         </p:nvSpPr>
-        <p:spPr/>
+        <p:spPr>
+          <a:xfrm>
+            <a:off x="304801" y="2773312"/>
+            <a:ext cx="3513055" cy="1751553"/>
+          </a:xfrm>
+        </p:spPr>
         <p:txBody>
-          <a:bodyPr/>
+          <a:bodyPr lIns="91440" tIns="45720" rIns="91440" bIns="45720" anchor="t">
+            <a:normAutofit fontScale="90000"/>
+          </a:bodyPr>
           <a:lstStyle/>
           <a:p>
             <a:r>
-              <a:rPr lang="es-CO" dirty="0"/>
-              <a:t>1</a:t>
+              <a:rPr lang="es-CO" b="1"/>
+              <a:t>RESULTADOS COMBINANDO MODELOS POR MEJOR ERROR PARA TODO EL PORTAFOLIO DE LIQUIDOS</a:t>
             </a:r>
+            <a:endParaRPr lang="es-CO" b="1">
+              <a:cs typeface="Arial"/>
+            </a:endParaRPr>
           </a:p>
         </p:txBody>
       </p:sp>
-      <p:sp>
-        <p:nvSpPr>
-          <p:cNvPr id="7" name="CuadroTexto 6">
+      <p:pic>
+        <p:nvPicPr>
+          <p:cNvPr id="8" name="Imagen 7" descr="Diagrama&#10;&#10;El contenido generado por IA puede ser incorrecto.">
             <a:extLst>
               <a:ext uri="{FF2B5EF4-FFF2-40B4-BE49-F238E27FC236}">
-                <a16:creationId xmlns:a16="http://schemas.microsoft.com/office/drawing/2014/main" id="{91F33DDB-060A-DDB9-B494-7F506604D8C4}"/>
+                <a16:creationId xmlns:a16="http://schemas.microsoft.com/office/drawing/2014/main" id="{9DC6966A-1329-22E8-53E1-297879E3182E}"/>
               </a:ext>
             </a:extLst>
           </p:cNvPr>
-          <p:cNvSpPr txBox="1"/>
+          <p:cNvPicPr>
+            <a:picLocks noChangeAspect="1"/>
+          </p:cNvPicPr>
           <p:nvPr/>
-        </p:nvSpPr>
+        </p:nvPicPr>
+        <p:blipFill>
+          <a:blip r:embed="rId2"/>
+          <a:stretch>
+            <a:fillRect/>
+          </a:stretch>
+        </p:blipFill>
         <p:spPr>
           <a:xfrm>
-            <a:off x="1019034" y="5529911"/>
-            <a:ext cx="10163789" cy="830997"/>
+            <a:off x="3820463" y="269137"/>
+            <a:ext cx="6893456" cy="6339663"/>
           </a:xfrm>
           <a:prstGeom prst="rect">
             <a:avLst/>
           </a:prstGeom>
-          <a:noFill/>
         </p:spPr>
-        <p:txBody>
-          <a:bodyPr wrap="square" lIns="91440" tIns="45720" rIns="91440" bIns="45720" anchor="t">
-            <a:spAutoFit/>
-          </a:bodyPr>
-          <a:lstStyle/>
-          <a:p>
-            <a:pPr marL="0" marR="0" lvl="0" indent="0" algn="ctr" defTabSz="914400" rtl="0" eaLnBrk="0" fontAlgn="base" latinLnBrk="0" hangingPunct="0">
-              <a:lnSpc>
-                <a:spcPct val="100000"/>
-              </a:lnSpc>
-              <a:spcBef>
-                <a:spcPct val="0"/>
-              </a:spcBef>
-              <a:spcAft>
-                <a:spcPct val="0"/>
-              </a:spcAft>
-              <a:buClrTx/>
-              <a:buSzTx/>
-              <a:buFontTx/>
-              <a:buChar char="•"/>
-              <a:tabLst/>
-            </a:pPr>
-            <a:endParaRPr lang="es-CO" altLang="es-CO" sz="2400" b="1" dirty="0">
-              <a:solidFill>
-                <a:srgbClr val="020B0F"/>
-              </a:solidFill>
-              <a:latin typeface="Arial" panose="020B0604020202020204" pitchFamily="34" charset="0"/>
-            </a:endParaRPr>
-          </a:p>
-          <a:p>
-            <a:pPr marL="0" marR="0" lvl="0" indent="0" algn="ctr" defTabSz="914400" rtl="0" eaLnBrk="0" fontAlgn="base" latinLnBrk="0" hangingPunct="0">
-              <a:lnSpc>
-                <a:spcPct val="100000"/>
-              </a:lnSpc>
-              <a:spcBef>
-                <a:spcPct val="0"/>
-              </a:spcBef>
-              <a:spcAft>
-                <a:spcPct val="0"/>
-              </a:spcAft>
-              <a:buClrTx/>
-              <a:buSzTx/>
-              <a:tabLst/>
-            </a:pPr>
-            <a:r>
-              <a:rPr lang="es-ES" altLang="es-CO" sz="2400" b="1" dirty="0">
-                <a:solidFill>
-                  <a:srgbClr val="5454E9"/>
-                </a:solidFill>
-                <a:latin typeface="+mj-lt"/>
-                <a:ea typeface="+mj-lt"/>
-                <a:cs typeface="+mj-lt"/>
-              </a:rPr>
-              <a:t>CONCLUSIONES</a:t>
-            </a:r>
-            <a:endParaRPr lang="es-CO" altLang="es-CO" sz="2400" b="1" dirty="0">
-              <a:solidFill>
-                <a:srgbClr val="5454E9"/>
-              </a:solidFill>
-              <a:latin typeface="+mj-lt"/>
-              <a:ea typeface="+mj-lt"/>
-              <a:cs typeface="+mj-lt"/>
-            </a:endParaRPr>
-          </a:p>
-        </p:txBody>
-      </p:sp>
-      <p:graphicFrame>
-        <p:nvGraphicFramePr>
-          <p:cNvPr id="8" name="Marcador de contenido 2">
-            <a:extLst>
-              <a:ext uri="{FF2B5EF4-FFF2-40B4-BE49-F238E27FC236}">
-                <a16:creationId xmlns:a16="http://schemas.microsoft.com/office/drawing/2014/main" id="{135D3F68-F84D-AD30-116B-D226C7F1AA89}"/>
-              </a:ext>
-            </a:extLst>
-          </p:cNvPr>
-          <p:cNvGraphicFramePr>
-            <a:graphicFrameLocks/>
-          </p:cNvGraphicFramePr>
-          <p:nvPr>
-            <p:extLst>
-              <p:ext uri="{D42A27DB-BD31-4B8C-83A1-F6EECF244321}">
-                <p14:modId xmlns:p14="http://schemas.microsoft.com/office/powerpoint/2010/main" val="2911355453"/>
-              </p:ext>
-            </p:extLst>
-          </p:nvPr>
-        </p:nvGraphicFramePr>
-        <p:xfrm>
-          <a:off x="1447368" y="122877"/>
-          <a:ext cx="10043017" cy="5415284"/>
-        </p:xfrm>
-        <a:graphic>
-          <a:graphicData uri="http://schemas.openxmlformats.org/drawingml/2006/diagram">
-            <dgm:relIds xmlns:dgm="http://schemas.openxmlformats.org/drawingml/2006/diagram" xmlns:r="http://schemas.openxmlformats.org/officeDocument/2006/relationships" r:dm="rId3" r:lo="rId4" r:qs="rId5" r:cs="rId6"/>
-          </a:graphicData>
-        </a:graphic>
-      </p:graphicFrame>
+      </p:pic>
     </p:spTree>
     <p:extLst>
       <p:ext uri="{BB962C8B-B14F-4D97-AF65-F5344CB8AC3E}">
-        <p14:creationId xmlns:p14="http://schemas.microsoft.com/office/powerpoint/2010/main" val="425621508"/>
+        <p14:creationId xmlns:p14="http://schemas.microsoft.com/office/powerpoint/2010/main" val="25790549"/>
       </p:ext>
     </p:extLst>
   </p:cSld>
@@ -23761,6 +24925,23 @@
 </file>
 
 <file path=customXml/item1.xml><?xml version="1.0" encoding="utf-8"?>
+<?mso-contentType ?>
+<FormTemplates xmlns="http://schemas.microsoft.com/sharepoint/v3/contenttype/forms">
+  <Display>DocumentLibraryForm</Display>
+  <Edit>DocumentLibraryForm</Edit>
+  <New>DocumentLibraryForm</New>
+</FormTemplates>
+</file>
+
+<file path=customXml/item2.xml><?xml version="1.0" encoding="utf-8"?>
+<p:properties xmlns:p="http://schemas.microsoft.com/office/2006/metadata/properties" xmlns:xsi="http://www.w3.org/2001/XMLSchema-instance" xmlns:pc="http://schemas.microsoft.com/office/infopath/2007/PartnerControls">
+  <documentManagement>
+    <_activity xmlns="71136f2a-fc58-4c24-9c71-f0fd76a1295e" xsi:nil="true"/>
+  </documentManagement>
+</p:properties>
+</file>
+
+<file path=customXml/item3.xml><?xml version="1.0" encoding="utf-8"?>
 <ct:contentTypeSchema xmlns:ct="http://schemas.microsoft.com/office/2006/metadata/contentType" xmlns:ma="http://schemas.microsoft.com/office/2006/metadata/properties/metaAttributes" ct:_="" ma:_="" ma:contentTypeName="Documento" ma:contentTypeID="0x010100DE722B5B68165D439DCDD15DD9730666" ma:contentTypeVersion="9" ma:contentTypeDescription="Crear nuevo documento." ma:contentTypeScope="" ma:versionID="d946a6df880dbb09a3952cc8f64d3b29">
   <xsd:schema xmlns:xsd="http://www.w3.org/2001/XMLSchema" xmlns:xs="http://www.w3.org/2001/XMLSchema" xmlns:p="http://schemas.microsoft.com/office/2006/metadata/properties" xmlns:ns3="71136f2a-fc58-4c24-9c71-f0fd76a1295e" targetNamespace="http://schemas.microsoft.com/office/2006/metadata/properties" ma:root="true" ma:fieldsID="258108e6172151c816269c1d60f09537" ns3:_="">
     <xsd:import namespace="71136f2a-fc58-4c24-9c71-f0fd76a1295e"/>
@@ -23934,42 +25115,7 @@
 </ct:contentTypeSchema>
 </file>
 
-<file path=customXml/item2.xml><?xml version="1.0" encoding="utf-8"?>
-<?mso-contentType ?>
-<FormTemplates xmlns="http://schemas.microsoft.com/sharepoint/v3/contenttype/forms">
-  <Display>DocumentLibraryForm</Display>
-  <Edit>DocumentLibraryForm</Edit>
-  <New>DocumentLibraryForm</New>
-</FormTemplates>
-</file>
-
-<file path=customXml/item3.xml><?xml version="1.0" encoding="utf-8"?>
-<p:properties xmlns:p="http://schemas.microsoft.com/office/2006/metadata/properties" xmlns:xsi="http://www.w3.org/2001/XMLSchema-instance" xmlns:pc="http://schemas.microsoft.com/office/infopath/2007/PartnerControls">
-  <documentManagement>
-    <_activity xmlns="71136f2a-fc58-4c24-9c71-f0fd76a1295e" xsi:nil="true"/>
-  </documentManagement>
-</p:properties>
-</file>
-
 <file path=customXml/itemProps1.xml><?xml version="1.0" encoding="utf-8"?>
-<ds:datastoreItem xmlns:ds="http://schemas.openxmlformats.org/officeDocument/2006/customXml" ds:itemID="{4CD9B0D0-BA34-4424-B8F5-D2FF2BA57553}">
-  <ds:schemaRefs>
-    <ds:schemaRef ds:uri="http://schemas.microsoft.com/office/2006/metadata/contentType"/>
-    <ds:schemaRef ds:uri="http://schemas.microsoft.com/office/2006/metadata/properties/metaAttributes"/>
-    <ds:schemaRef ds:uri="http://www.w3.org/2001/XMLSchema"/>
-    <ds:schemaRef ds:uri="http://schemas.microsoft.com/office/2006/metadata/properties"/>
-    <ds:schemaRef ds:uri="71136f2a-fc58-4c24-9c71-f0fd76a1295e"/>
-    <ds:schemaRef ds:uri="http://schemas.microsoft.com/office/2006/documentManagement/types"/>
-    <ds:schemaRef ds:uri="http://schemas.microsoft.com/office/infopath/2007/PartnerControls"/>
-    <ds:schemaRef ds:uri="http://schemas.openxmlformats.org/package/2006/metadata/core-properties"/>
-    <ds:schemaRef ds:uri="http://purl.org/dc/elements/1.1/"/>
-    <ds:schemaRef ds:uri="http://purl.org/dc/terms/"/>
-    <ds:schemaRef ds:uri="http://schemas.microsoft.com/internal/obd"/>
-  </ds:schemaRefs>
-</ds:datastoreItem>
-</file>
-
-<file path=customXml/itemProps2.xml><?xml version="1.0" encoding="utf-8"?>
 <ds:datastoreItem xmlns:ds="http://schemas.openxmlformats.org/officeDocument/2006/customXml" ds:itemID="{87D2A1B0-FF3E-4009-940D-AED0EB70AA20}">
   <ds:schemaRefs>
     <ds:schemaRef ds:uri="http://schemas.microsoft.com/sharepoint/v3/contenttype/forms"/>
@@ -23977,18 +25123,36 @@
 </ds:datastoreItem>
 </file>
 
-<file path=customXml/itemProps3.xml><?xml version="1.0" encoding="utf-8"?>
+<file path=customXml/itemProps2.xml><?xml version="1.0" encoding="utf-8"?>
 <ds:datastoreItem xmlns:ds="http://schemas.openxmlformats.org/officeDocument/2006/customXml" ds:itemID="{836ADCFB-D8B6-4597-B750-4F782D11F82C}">
   <ds:schemaRefs>
-    <ds:schemaRef ds:uri="http://www.w3.org/XML/1998/namespace"/>
-    <ds:schemaRef ds:uri="http://schemas.microsoft.com/office/2006/documentManagement/types"/>
-    <ds:schemaRef ds:uri="http://purl.org/dc/terms/"/>
-    <ds:schemaRef ds:uri="http://schemas.openxmlformats.org/package/2006/metadata/core-properties"/>
-    <ds:schemaRef ds:uri="http://schemas.microsoft.com/office/infopath/2007/PartnerControls"/>
+    <ds:schemaRef ds:uri="71136f2a-fc58-4c24-9c71-f0fd76a1295e"/>
     <ds:schemaRef ds:uri="http://purl.org/dc/dcmitype/"/>
     <ds:schemaRef ds:uri="http://purl.org/dc/elements/1.1/"/>
+    <ds:schemaRef ds:uri="http://purl.org/dc/terms/"/>
+    <ds:schemaRef ds:uri="http://schemas.microsoft.com/office/2006/documentManagement/types"/>
     <ds:schemaRef ds:uri="http://schemas.microsoft.com/office/2006/metadata/properties"/>
+    <ds:schemaRef ds:uri="http://schemas.microsoft.com/office/infopath/2007/PartnerControls"/>
+    <ds:schemaRef ds:uri="http://schemas.openxmlformats.org/package/2006/metadata/core-properties"/>
+    <ds:schemaRef ds:uri="http://www.w3.org/XML/1998/namespace"/>
+  </ds:schemaRefs>
+</ds:datastoreItem>
+</file>
+
+<file path=customXml/itemProps3.xml><?xml version="1.0" encoding="utf-8"?>
+<ds:datastoreItem xmlns:ds="http://schemas.openxmlformats.org/officeDocument/2006/customXml" ds:itemID="{4CD9B0D0-BA34-4424-B8F5-D2FF2BA57553}">
+  <ds:schemaRefs>
     <ds:schemaRef ds:uri="71136f2a-fc58-4c24-9c71-f0fd76a1295e"/>
+    <ds:schemaRef ds:uri="http://purl.org/dc/elements/1.1/"/>
+    <ds:schemaRef ds:uri="http://purl.org/dc/terms/"/>
+    <ds:schemaRef ds:uri="http://schemas.microsoft.com/internal/obd"/>
+    <ds:schemaRef ds:uri="http://schemas.microsoft.com/office/2006/documentManagement/types"/>
+    <ds:schemaRef ds:uri="http://schemas.microsoft.com/office/2006/metadata/contentType"/>
+    <ds:schemaRef ds:uri="http://schemas.microsoft.com/office/2006/metadata/properties"/>
+    <ds:schemaRef ds:uri="http://schemas.microsoft.com/office/2006/metadata/properties/metaAttributes"/>
+    <ds:schemaRef ds:uri="http://schemas.microsoft.com/office/infopath/2007/PartnerControls"/>
+    <ds:schemaRef ds:uri="http://schemas.openxmlformats.org/package/2006/metadata/core-properties"/>
+    <ds:schemaRef ds:uri="http://www.w3.org/2001/XMLSchema"/>
   </ds:schemaRefs>
 </ds:datastoreItem>
 </file>